--- a/Technical-Documents/Parallel-Computing/parallel-computing-course/1. Architecture作业/GPUNet.pptx
+++ b/Technical-Documents/Parallel-Computing/parallel-computing-course/1. Architecture作业/GPUNet.pptx
@@ -226,7 +226,7 @@
           <a:p>
             <a:fld id="{73A93084-53C3-4D41-9C09-AF8810E82D9D}" type="datetimeFigureOut">
               <a:rPr lang="zh-CN" altLang="en-US" smtClean="0"/>
-              <a:t>2019/3/13</a:t>
+              <a:t>2019/5/14</a:t>
             </a:fld>
             <a:endParaRPr lang="zh-CN" altLang="en-US"/>
           </a:p>
@@ -515,7 +515,7 @@
           <p:cNvPr id="6146" name="幻灯片图像占位符 1">
             <a:extLst>
               <a:ext uri="{FF2B5EF4-FFF2-40B4-BE49-F238E27FC236}">
-                <a16:creationId xmlns="" xmlns:a16="http://schemas.microsoft.com/office/drawing/2014/main" id="{4908B133-C54F-400F-8F70-355C57C0BE11}"/>
+                <a16:creationId xmlns:a16="http://schemas.microsoft.com/office/drawing/2014/main" xmlns="" id="{4908B133-C54F-400F-8F70-355C57C0BE11}"/>
               </a:ext>
             </a:extLst>
           </p:cNvPr>
@@ -552,7 +552,7 @@
           <p:cNvPr id="6147" name="备注占位符 2">
             <a:extLst>
               <a:ext uri="{FF2B5EF4-FFF2-40B4-BE49-F238E27FC236}">
-                <a16:creationId xmlns="" xmlns:a16="http://schemas.microsoft.com/office/drawing/2014/main" id="{7D16C196-D24B-4BE0-AE74-D44907B2A1B1}"/>
+                <a16:creationId xmlns:a16="http://schemas.microsoft.com/office/drawing/2014/main" xmlns="" id="{7D16C196-D24B-4BE0-AE74-D44907B2A1B1}"/>
               </a:ext>
             </a:extLst>
           </p:cNvPr>
@@ -607,7 +607,7 @@
           <p:cNvPr id="6148" name="灯片编号占位符 3">
             <a:extLst>
               <a:ext uri="{FF2B5EF4-FFF2-40B4-BE49-F238E27FC236}">
-                <a16:creationId xmlns="" xmlns:a16="http://schemas.microsoft.com/office/drawing/2014/main" id="{D230392C-ED50-49C3-93A6-10868BF6DADE}"/>
+                <a16:creationId xmlns:a16="http://schemas.microsoft.com/office/drawing/2014/main" xmlns="" id="{D230392C-ED50-49C3-93A6-10868BF6DADE}"/>
               </a:ext>
             </a:extLst>
           </p:cNvPr>
@@ -857,7 +857,7 @@
           <p:cNvPr id="6146" name="幻灯片图像占位符 1">
             <a:extLst>
               <a:ext uri="{FF2B5EF4-FFF2-40B4-BE49-F238E27FC236}">
-                <a16:creationId xmlns="" xmlns:a16="http://schemas.microsoft.com/office/drawing/2014/main" id="{4908B133-C54F-400F-8F70-355C57C0BE11}"/>
+                <a16:creationId xmlns:a16="http://schemas.microsoft.com/office/drawing/2014/main" xmlns="" id="{4908B133-C54F-400F-8F70-355C57C0BE11}"/>
               </a:ext>
             </a:extLst>
           </p:cNvPr>
@@ -894,7 +894,7 @@
           <p:cNvPr id="6147" name="备注占位符 2">
             <a:extLst>
               <a:ext uri="{FF2B5EF4-FFF2-40B4-BE49-F238E27FC236}">
-                <a16:creationId xmlns="" xmlns:a16="http://schemas.microsoft.com/office/drawing/2014/main" id="{7D16C196-D24B-4BE0-AE74-D44907B2A1B1}"/>
+                <a16:creationId xmlns:a16="http://schemas.microsoft.com/office/drawing/2014/main" xmlns="" id="{7D16C196-D24B-4BE0-AE74-D44907B2A1B1}"/>
               </a:ext>
             </a:extLst>
           </p:cNvPr>
@@ -949,7 +949,7 @@
           <p:cNvPr id="6148" name="灯片编号占位符 3">
             <a:extLst>
               <a:ext uri="{FF2B5EF4-FFF2-40B4-BE49-F238E27FC236}">
-                <a16:creationId xmlns="" xmlns:a16="http://schemas.microsoft.com/office/drawing/2014/main" id="{D230392C-ED50-49C3-93A6-10868BF6DADE}"/>
+                <a16:creationId xmlns:a16="http://schemas.microsoft.com/office/drawing/2014/main" xmlns="" id="{D230392C-ED50-49C3-93A6-10868BF6DADE}"/>
               </a:ext>
             </a:extLst>
           </p:cNvPr>
@@ -1199,7 +1199,7 @@
           <p:cNvPr id="6146" name="幻灯片图像占位符 1">
             <a:extLst>
               <a:ext uri="{FF2B5EF4-FFF2-40B4-BE49-F238E27FC236}">
-                <a16:creationId xmlns="" xmlns:a16="http://schemas.microsoft.com/office/drawing/2014/main" id="{4908B133-C54F-400F-8F70-355C57C0BE11}"/>
+                <a16:creationId xmlns:a16="http://schemas.microsoft.com/office/drawing/2014/main" xmlns="" id="{4908B133-C54F-400F-8F70-355C57C0BE11}"/>
               </a:ext>
             </a:extLst>
           </p:cNvPr>
@@ -1236,7 +1236,7 @@
           <p:cNvPr id="6147" name="备注占位符 2">
             <a:extLst>
               <a:ext uri="{FF2B5EF4-FFF2-40B4-BE49-F238E27FC236}">
-                <a16:creationId xmlns="" xmlns:a16="http://schemas.microsoft.com/office/drawing/2014/main" id="{7D16C196-D24B-4BE0-AE74-D44907B2A1B1}"/>
+                <a16:creationId xmlns:a16="http://schemas.microsoft.com/office/drawing/2014/main" xmlns="" id="{7D16C196-D24B-4BE0-AE74-D44907B2A1B1}"/>
               </a:ext>
             </a:extLst>
           </p:cNvPr>
@@ -1291,7 +1291,7 @@
           <p:cNvPr id="6148" name="灯片编号占位符 3">
             <a:extLst>
               <a:ext uri="{FF2B5EF4-FFF2-40B4-BE49-F238E27FC236}">
-                <a16:creationId xmlns="" xmlns:a16="http://schemas.microsoft.com/office/drawing/2014/main" id="{D230392C-ED50-49C3-93A6-10868BF6DADE}"/>
+                <a16:creationId xmlns:a16="http://schemas.microsoft.com/office/drawing/2014/main" xmlns="" id="{D230392C-ED50-49C3-93A6-10868BF6DADE}"/>
               </a:ext>
             </a:extLst>
           </p:cNvPr>
@@ -1541,7 +1541,7 @@
           <p:cNvPr id="6146" name="幻灯片图像占位符 1">
             <a:extLst>
               <a:ext uri="{FF2B5EF4-FFF2-40B4-BE49-F238E27FC236}">
-                <a16:creationId xmlns="" xmlns:a16="http://schemas.microsoft.com/office/drawing/2014/main" id="{4908B133-C54F-400F-8F70-355C57C0BE11}"/>
+                <a16:creationId xmlns:a16="http://schemas.microsoft.com/office/drawing/2014/main" xmlns="" id="{4908B133-C54F-400F-8F70-355C57C0BE11}"/>
               </a:ext>
             </a:extLst>
           </p:cNvPr>
@@ -1578,7 +1578,7 @@
           <p:cNvPr id="6147" name="备注占位符 2">
             <a:extLst>
               <a:ext uri="{FF2B5EF4-FFF2-40B4-BE49-F238E27FC236}">
-                <a16:creationId xmlns="" xmlns:a16="http://schemas.microsoft.com/office/drawing/2014/main" id="{7D16C196-D24B-4BE0-AE74-D44907B2A1B1}"/>
+                <a16:creationId xmlns:a16="http://schemas.microsoft.com/office/drawing/2014/main" xmlns="" id="{7D16C196-D24B-4BE0-AE74-D44907B2A1B1}"/>
               </a:ext>
             </a:extLst>
           </p:cNvPr>
@@ -1633,7 +1633,7 @@
           <p:cNvPr id="6148" name="灯片编号占位符 3">
             <a:extLst>
               <a:ext uri="{FF2B5EF4-FFF2-40B4-BE49-F238E27FC236}">
-                <a16:creationId xmlns="" xmlns:a16="http://schemas.microsoft.com/office/drawing/2014/main" id="{D230392C-ED50-49C3-93A6-10868BF6DADE}"/>
+                <a16:creationId xmlns:a16="http://schemas.microsoft.com/office/drawing/2014/main" xmlns="" id="{D230392C-ED50-49C3-93A6-10868BF6DADE}"/>
               </a:ext>
             </a:extLst>
           </p:cNvPr>
@@ -1883,7 +1883,7 @@
           <p:cNvPr id="6146" name="幻灯片图像占位符 1">
             <a:extLst>
               <a:ext uri="{FF2B5EF4-FFF2-40B4-BE49-F238E27FC236}">
-                <a16:creationId xmlns="" xmlns:a16="http://schemas.microsoft.com/office/drawing/2014/main" id="{4908B133-C54F-400F-8F70-355C57C0BE11}"/>
+                <a16:creationId xmlns:a16="http://schemas.microsoft.com/office/drawing/2014/main" xmlns="" id="{4908B133-C54F-400F-8F70-355C57C0BE11}"/>
               </a:ext>
             </a:extLst>
           </p:cNvPr>
@@ -1920,7 +1920,7 @@
           <p:cNvPr id="6147" name="备注占位符 2">
             <a:extLst>
               <a:ext uri="{FF2B5EF4-FFF2-40B4-BE49-F238E27FC236}">
-                <a16:creationId xmlns="" xmlns:a16="http://schemas.microsoft.com/office/drawing/2014/main" id="{7D16C196-D24B-4BE0-AE74-D44907B2A1B1}"/>
+                <a16:creationId xmlns:a16="http://schemas.microsoft.com/office/drawing/2014/main" xmlns="" id="{7D16C196-D24B-4BE0-AE74-D44907B2A1B1}"/>
               </a:ext>
             </a:extLst>
           </p:cNvPr>
@@ -1975,7 +1975,7 @@
           <p:cNvPr id="6148" name="灯片编号占位符 3">
             <a:extLst>
               <a:ext uri="{FF2B5EF4-FFF2-40B4-BE49-F238E27FC236}">
-                <a16:creationId xmlns="" xmlns:a16="http://schemas.microsoft.com/office/drawing/2014/main" id="{D230392C-ED50-49C3-93A6-10868BF6DADE}"/>
+                <a16:creationId xmlns:a16="http://schemas.microsoft.com/office/drawing/2014/main" xmlns="" id="{D230392C-ED50-49C3-93A6-10868BF6DADE}"/>
               </a:ext>
             </a:extLst>
           </p:cNvPr>
@@ -2225,7 +2225,7 @@
           <p:cNvPr id="6146" name="幻灯片图像占位符 1">
             <a:extLst>
               <a:ext uri="{FF2B5EF4-FFF2-40B4-BE49-F238E27FC236}">
-                <a16:creationId xmlns="" xmlns:a16="http://schemas.microsoft.com/office/drawing/2014/main" id="{4908B133-C54F-400F-8F70-355C57C0BE11}"/>
+                <a16:creationId xmlns:a16="http://schemas.microsoft.com/office/drawing/2014/main" xmlns="" id="{4908B133-C54F-400F-8F70-355C57C0BE11}"/>
               </a:ext>
             </a:extLst>
           </p:cNvPr>
@@ -2262,7 +2262,7 @@
           <p:cNvPr id="6147" name="备注占位符 2">
             <a:extLst>
               <a:ext uri="{FF2B5EF4-FFF2-40B4-BE49-F238E27FC236}">
-                <a16:creationId xmlns="" xmlns:a16="http://schemas.microsoft.com/office/drawing/2014/main" id="{7D16C196-D24B-4BE0-AE74-D44907B2A1B1}"/>
+                <a16:creationId xmlns:a16="http://schemas.microsoft.com/office/drawing/2014/main" xmlns="" id="{7D16C196-D24B-4BE0-AE74-D44907B2A1B1}"/>
               </a:ext>
             </a:extLst>
           </p:cNvPr>
@@ -2317,7 +2317,7 @@
           <p:cNvPr id="6148" name="灯片编号占位符 3">
             <a:extLst>
               <a:ext uri="{FF2B5EF4-FFF2-40B4-BE49-F238E27FC236}">
-                <a16:creationId xmlns="" xmlns:a16="http://schemas.microsoft.com/office/drawing/2014/main" id="{D230392C-ED50-49C3-93A6-10868BF6DADE}"/>
+                <a16:creationId xmlns:a16="http://schemas.microsoft.com/office/drawing/2014/main" xmlns="" id="{D230392C-ED50-49C3-93A6-10868BF6DADE}"/>
               </a:ext>
             </a:extLst>
           </p:cNvPr>
@@ -2567,7 +2567,7 @@
           <p:cNvPr id="6146" name="幻灯片图像占位符 1">
             <a:extLst>
               <a:ext uri="{FF2B5EF4-FFF2-40B4-BE49-F238E27FC236}">
-                <a16:creationId xmlns="" xmlns:a16="http://schemas.microsoft.com/office/drawing/2014/main" id="{4908B133-C54F-400F-8F70-355C57C0BE11}"/>
+                <a16:creationId xmlns:a16="http://schemas.microsoft.com/office/drawing/2014/main" xmlns="" id="{4908B133-C54F-400F-8F70-355C57C0BE11}"/>
               </a:ext>
             </a:extLst>
           </p:cNvPr>
@@ -2604,7 +2604,7 @@
           <p:cNvPr id="6147" name="备注占位符 2">
             <a:extLst>
               <a:ext uri="{FF2B5EF4-FFF2-40B4-BE49-F238E27FC236}">
-                <a16:creationId xmlns="" xmlns:a16="http://schemas.microsoft.com/office/drawing/2014/main" id="{7D16C196-D24B-4BE0-AE74-D44907B2A1B1}"/>
+                <a16:creationId xmlns:a16="http://schemas.microsoft.com/office/drawing/2014/main" xmlns="" id="{7D16C196-D24B-4BE0-AE74-D44907B2A1B1}"/>
               </a:ext>
             </a:extLst>
           </p:cNvPr>
@@ -2659,7 +2659,7 @@
           <p:cNvPr id="6148" name="灯片编号占位符 3">
             <a:extLst>
               <a:ext uri="{FF2B5EF4-FFF2-40B4-BE49-F238E27FC236}">
-                <a16:creationId xmlns="" xmlns:a16="http://schemas.microsoft.com/office/drawing/2014/main" id="{D230392C-ED50-49C3-93A6-10868BF6DADE}"/>
+                <a16:creationId xmlns:a16="http://schemas.microsoft.com/office/drawing/2014/main" xmlns="" id="{D230392C-ED50-49C3-93A6-10868BF6DADE}"/>
               </a:ext>
             </a:extLst>
           </p:cNvPr>
@@ -2909,7 +2909,7 @@
           <p:cNvPr id="6146" name="幻灯片图像占位符 1">
             <a:extLst>
               <a:ext uri="{FF2B5EF4-FFF2-40B4-BE49-F238E27FC236}">
-                <a16:creationId xmlns="" xmlns:a16="http://schemas.microsoft.com/office/drawing/2014/main" id="{4908B133-C54F-400F-8F70-355C57C0BE11}"/>
+                <a16:creationId xmlns:a16="http://schemas.microsoft.com/office/drawing/2014/main" xmlns="" id="{4908B133-C54F-400F-8F70-355C57C0BE11}"/>
               </a:ext>
             </a:extLst>
           </p:cNvPr>
@@ -2946,7 +2946,7 @@
           <p:cNvPr id="6147" name="备注占位符 2">
             <a:extLst>
               <a:ext uri="{FF2B5EF4-FFF2-40B4-BE49-F238E27FC236}">
-                <a16:creationId xmlns="" xmlns:a16="http://schemas.microsoft.com/office/drawing/2014/main" id="{7D16C196-D24B-4BE0-AE74-D44907B2A1B1}"/>
+                <a16:creationId xmlns:a16="http://schemas.microsoft.com/office/drawing/2014/main" xmlns="" id="{7D16C196-D24B-4BE0-AE74-D44907B2A1B1}"/>
               </a:ext>
             </a:extLst>
           </p:cNvPr>
@@ -3001,7 +3001,7 @@
           <p:cNvPr id="6148" name="灯片编号占位符 3">
             <a:extLst>
               <a:ext uri="{FF2B5EF4-FFF2-40B4-BE49-F238E27FC236}">
-                <a16:creationId xmlns="" xmlns:a16="http://schemas.microsoft.com/office/drawing/2014/main" id="{D230392C-ED50-49C3-93A6-10868BF6DADE}"/>
+                <a16:creationId xmlns:a16="http://schemas.microsoft.com/office/drawing/2014/main" xmlns="" id="{D230392C-ED50-49C3-93A6-10868BF6DADE}"/>
               </a:ext>
             </a:extLst>
           </p:cNvPr>
@@ -3251,7 +3251,7 @@
           <p:cNvPr id="6146" name="幻灯片图像占位符 1">
             <a:extLst>
               <a:ext uri="{FF2B5EF4-FFF2-40B4-BE49-F238E27FC236}">
-                <a16:creationId xmlns="" xmlns:a16="http://schemas.microsoft.com/office/drawing/2014/main" id="{4908B133-C54F-400F-8F70-355C57C0BE11}"/>
+                <a16:creationId xmlns:a16="http://schemas.microsoft.com/office/drawing/2014/main" xmlns="" id="{4908B133-C54F-400F-8F70-355C57C0BE11}"/>
               </a:ext>
             </a:extLst>
           </p:cNvPr>
@@ -3288,7 +3288,7 @@
           <p:cNvPr id="6147" name="备注占位符 2">
             <a:extLst>
               <a:ext uri="{FF2B5EF4-FFF2-40B4-BE49-F238E27FC236}">
-                <a16:creationId xmlns="" xmlns:a16="http://schemas.microsoft.com/office/drawing/2014/main" id="{7D16C196-D24B-4BE0-AE74-D44907B2A1B1}"/>
+                <a16:creationId xmlns:a16="http://schemas.microsoft.com/office/drawing/2014/main" xmlns="" id="{7D16C196-D24B-4BE0-AE74-D44907B2A1B1}"/>
               </a:ext>
             </a:extLst>
           </p:cNvPr>
@@ -3343,7 +3343,7 @@
           <p:cNvPr id="6148" name="灯片编号占位符 3">
             <a:extLst>
               <a:ext uri="{FF2B5EF4-FFF2-40B4-BE49-F238E27FC236}">
-                <a16:creationId xmlns="" xmlns:a16="http://schemas.microsoft.com/office/drawing/2014/main" id="{D230392C-ED50-49C3-93A6-10868BF6DADE}"/>
+                <a16:creationId xmlns:a16="http://schemas.microsoft.com/office/drawing/2014/main" xmlns="" id="{D230392C-ED50-49C3-93A6-10868BF6DADE}"/>
               </a:ext>
             </a:extLst>
           </p:cNvPr>
@@ -3593,7 +3593,7 @@
           <p:cNvPr id="6146" name="幻灯片图像占位符 1">
             <a:extLst>
               <a:ext uri="{FF2B5EF4-FFF2-40B4-BE49-F238E27FC236}">
-                <a16:creationId xmlns="" xmlns:a16="http://schemas.microsoft.com/office/drawing/2014/main" id="{4908B133-C54F-400F-8F70-355C57C0BE11}"/>
+                <a16:creationId xmlns:a16="http://schemas.microsoft.com/office/drawing/2014/main" xmlns="" id="{4908B133-C54F-400F-8F70-355C57C0BE11}"/>
               </a:ext>
             </a:extLst>
           </p:cNvPr>
@@ -3630,7 +3630,7 @@
           <p:cNvPr id="6147" name="备注占位符 2">
             <a:extLst>
               <a:ext uri="{FF2B5EF4-FFF2-40B4-BE49-F238E27FC236}">
-                <a16:creationId xmlns="" xmlns:a16="http://schemas.microsoft.com/office/drawing/2014/main" id="{7D16C196-D24B-4BE0-AE74-D44907B2A1B1}"/>
+                <a16:creationId xmlns:a16="http://schemas.microsoft.com/office/drawing/2014/main" xmlns="" id="{7D16C196-D24B-4BE0-AE74-D44907B2A1B1}"/>
               </a:ext>
             </a:extLst>
           </p:cNvPr>
@@ -3685,7 +3685,7 @@
           <p:cNvPr id="6148" name="灯片编号占位符 3">
             <a:extLst>
               <a:ext uri="{FF2B5EF4-FFF2-40B4-BE49-F238E27FC236}">
-                <a16:creationId xmlns="" xmlns:a16="http://schemas.microsoft.com/office/drawing/2014/main" id="{D230392C-ED50-49C3-93A6-10868BF6DADE}"/>
+                <a16:creationId xmlns:a16="http://schemas.microsoft.com/office/drawing/2014/main" xmlns="" id="{D230392C-ED50-49C3-93A6-10868BF6DADE}"/>
               </a:ext>
             </a:extLst>
           </p:cNvPr>
@@ -3935,7 +3935,7 @@
           <p:cNvPr id="6146" name="幻灯片图像占位符 1">
             <a:extLst>
               <a:ext uri="{FF2B5EF4-FFF2-40B4-BE49-F238E27FC236}">
-                <a16:creationId xmlns="" xmlns:a16="http://schemas.microsoft.com/office/drawing/2014/main" id="{4908B133-C54F-400F-8F70-355C57C0BE11}"/>
+                <a16:creationId xmlns:a16="http://schemas.microsoft.com/office/drawing/2014/main" xmlns="" id="{4908B133-C54F-400F-8F70-355C57C0BE11}"/>
               </a:ext>
             </a:extLst>
           </p:cNvPr>
@@ -3972,7 +3972,7 @@
           <p:cNvPr id="6147" name="备注占位符 2">
             <a:extLst>
               <a:ext uri="{FF2B5EF4-FFF2-40B4-BE49-F238E27FC236}">
-                <a16:creationId xmlns="" xmlns:a16="http://schemas.microsoft.com/office/drawing/2014/main" id="{7D16C196-D24B-4BE0-AE74-D44907B2A1B1}"/>
+                <a16:creationId xmlns:a16="http://schemas.microsoft.com/office/drawing/2014/main" xmlns="" id="{7D16C196-D24B-4BE0-AE74-D44907B2A1B1}"/>
               </a:ext>
             </a:extLst>
           </p:cNvPr>
@@ -4027,7 +4027,7 @@
           <p:cNvPr id="6148" name="灯片编号占位符 3">
             <a:extLst>
               <a:ext uri="{FF2B5EF4-FFF2-40B4-BE49-F238E27FC236}">
-                <a16:creationId xmlns="" xmlns:a16="http://schemas.microsoft.com/office/drawing/2014/main" id="{D230392C-ED50-49C3-93A6-10868BF6DADE}"/>
+                <a16:creationId xmlns:a16="http://schemas.microsoft.com/office/drawing/2014/main" xmlns="" id="{D230392C-ED50-49C3-93A6-10868BF6DADE}"/>
               </a:ext>
             </a:extLst>
           </p:cNvPr>
@@ -4277,7 +4277,7 @@
           <p:cNvPr id="6146" name="幻灯片图像占位符 1">
             <a:extLst>
               <a:ext uri="{FF2B5EF4-FFF2-40B4-BE49-F238E27FC236}">
-                <a16:creationId xmlns="" xmlns:a16="http://schemas.microsoft.com/office/drawing/2014/main" id="{4908B133-C54F-400F-8F70-355C57C0BE11}"/>
+                <a16:creationId xmlns:a16="http://schemas.microsoft.com/office/drawing/2014/main" xmlns="" id="{4908B133-C54F-400F-8F70-355C57C0BE11}"/>
               </a:ext>
             </a:extLst>
           </p:cNvPr>
@@ -4314,7 +4314,7 @@
           <p:cNvPr id="6147" name="备注占位符 2">
             <a:extLst>
               <a:ext uri="{FF2B5EF4-FFF2-40B4-BE49-F238E27FC236}">
-                <a16:creationId xmlns="" xmlns:a16="http://schemas.microsoft.com/office/drawing/2014/main" id="{7D16C196-D24B-4BE0-AE74-D44907B2A1B1}"/>
+                <a16:creationId xmlns:a16="http://schemas.microsoft.com/office/drawing/2014/main" xmlns="" id="{7D16C196-D24B-4BE0-AE74-D44907B2A1B1}"/>
               </a:ext>
             </a:extLst>
           </p:cNvPr>
@@ -4369,7 +4369,7 @@
           <p:cNvPr id="6148" name="灯片编号占位符 3">
             <a:extLst>
               <a:ext uri="{FF2B5EF4-FFF2-40B4-BE49-F238E27FC236}">
-                <a16:creationId xmlns="" xmlns:a16="http://schemas.microsoft.com/office/drawing/2014/main" id="{D230392C-ED50-49C3-93A6-10868BF6DADE}"/>
+                <a16:creationId xmlns:a16="http://schemas.microsoft.com/office/drawing/2014/main" xmlns="" id="{D230392C-ED50-49C3-93A6-10868BF6DADE}"/>
               </a:ext>
             </a:extLst>
           </p:cNvPr>
@@ -4619,7 +4619,7 @@
           <p:cNvPr id="6146" name="幻灯片图像占位符 1">
             <a:extLst>
               <a:ext uri="{FF2B5EF4-FFF2-40B4-BE49-F238E27FC236}">
-                <a16:creationId xmlns="" xmlns:a16="http://schemas.microsoft.com/office/drawing/2014/main" id="{4908B133-C54F-400F-8F70-355C57C0BE11}"/>
+                <a16:creationId xmlns:a16="http://schemas.microsoft.com/office/drawing/2014/main" xmlns="" id="{4908B133-C54F-400F-8F70-355C57C0BE11}"/>
               </a:ext>
             </a:extLst>
           </p:cNvPr>
@@ -4656,7 +4656,7 @@
           <p:cNvPr id="6147" name="备注占位符 2">
             <a:extLst>
               <a:ext uri="{FF2B5EF4-FFF2-40B4-BE49-F238E27FC236}">
-                <a16:creationId xmlns="" xmlns:a16="http://schemas.microsoft.com/office/drawing/2014/main" id="{7D16C196-D24B-4BE0-AE74-D44907B2A1B1}"/>
+                <a16:creationId xmlns:a16="http://schemas.microsoft.com/office/drawing/2014/main" xmlns="" id="{7D16C196-D24B-4BE0-AE74-D44907B2A1B1}"/>
               </a:ext>
             </a:extLst>
           </p:cNvPr>
@@ -4711,7 +4711,7 @@
           <p:cNvPr id="6148" name="灯片编号占位符 3">
             <a:extLst>
               <a:ext uri="{FF2B5EF4-FFF2-40B4-BE49-F238E27FC236}">
-                <a16:creationId xmlns="" xmlns:a16="http://schemas.microsoft.com/office/drawing/2014/main" id="{D230392C-ED50-49C3-93A6-10868BF6DADE}"/>
+                <a16:creationId xmlns:a16="http://schemas.microsoft.com/office/drawing/2014/main" xmlns="" id="{D230392C-ED50-49C3-93A6-10868BF6DADE}"/>
               </a:ext>
             </a:extLst>
           </p:cNvPr>
@@ -4961,7 +4961,7 @@
           <p:cNvPr id="6146" name="幻灯片图像占位符 1">
             <a:extLst>
               <a:ext uri="{FF2B5EF4-FFF2-40B4-BE49-F238E27FC236}">
-                <a16:creationId xmlns="" xmlns:a16="http://schemas.microsoft.com/office/drawing/2014/main" id="{4908B133-C54F-400F-8F70-355C57C0BE11}"/>
+                <a16:creationId xmlns:a16="http://schemas.microsoft.com/office/drawing/2014/main" xmlns="" id="{4908B133-C54F-400F-8F70-355C57C0BE11}"/>
               </a:ext>
             </a:extLst>
           </p:cNvPr>
@@ -4998,7 +4998,7 @@
           <p:cNvPr id="6147" name="备注占位符 2">
             <a:extLst>
               <a:ext uri="{FF2B5EF4-FFF2-40B4-BE49-F238E27FC236}">
-                <a16:creationId xmlns="" xmlns:a16="http://schemas.microsoft.com/office/drawing/2014/main" id="{7D16C196-D24B-4BE0-AE74-D44907B2A1B1}"/>
+                <a16:creationId xmlns:a16="http://schemas.microsoft.com/office/drawing/2014/main" xmlns="" id="{7D16C196-D24B-4BE0-AE74-D44907B2A1B1}"/>
               </a:ext>
             </a:extLst>
           </p:cNvPr>
@@ -5053,7 +5053,7 @@
           <p:cNvPr id="6148" name="灯片编号占位符 3">
             <a:extLst>
               <a:ext uri="{FF2B5EF4-FFF2-40B4-BE49-F238E27FC236}">
-                <a16:creationId xmlns="" xmlns:a16="http://schemas.microsoft.com/office/drawing/2014/main" id="{D230392C-ED50-49C3-93A6-10868BF6DADE}"/>
+                <a16:creationId xmlns:a16="http://schemas.microsoft.com/office/drawing/2014/main" xmlns="" id="{D230392C-ED50-49C3-93A6-10868BF6DADE}"/>
               </a:ext>
             </a:extLst>
           </p:cNvPr>
@@ -5303,7 +5303,7 @@
           <p:cNvPr id="6146" name="幻灯片图像占位符 1">
             <a:extLst>
               <a:ext uri="{FF2B5EF4-FFF2-40B4-BE49-F238E27FC236}">
-                <a16:creationId xmlns="" xmlns:a16="http://schemas.microsoft.com/office/drawing/2014/main" id="{4908B133-C54F-400F-8F70-355C57C0BE11}"/>
+                <a16:creationId xmlns:a16="http://schemas.microsoft.com/office/drawing/2014/main" xmlns="" id="{4908B133-C54F-400F-8F70-355C57C0BE11}"/>
               </a:ext>
             </a:extLst>
           </p:cNvPr>
@@ -5340,7 +5340,7 @@
           <p:cNvPr id="6147" name="备注占位符 2">
             <a:extLst>
               <a:ext uri="{FF2B5EF4-FFF2-40B4-BE49-F238E27FC236}">
-                <a16:creationId xmlns="" xmlns:a16="http://schemas.microsoft.com/office/drawing/2014/main" id="{7D16C196-D24B-4BE0-AE74-D44907B2A1B1}"/>
+                <a16:creationId xmlns:a16="http://schemas.microsoft.com/office/drawing/2014/main" xmlns="" id="{7D16C196-D24B-4BE0-AE74-D44907B2A1B1}"/>
               </a:ext>
             </a:extLst>
           </p:cNvPr>
@@ -5395,7 +5395,7 @@
           <p:cNvPr id="6148" name="灯片编号占位符 3">
             <a:extLst>
               <a:ext uri="{FF2B5EF4-FFF2-40B4-BE49-F238E27FC236}">
-                <a16:creationId xmlns="" xmlns:a16="http://schemas.microsoft.com/office/drawing/2014/main" id="{D230392C-ED50-49C3-93A6-10868BF6DADE}"/>
+                <a16:creationId xmlns:a16="http://schemas.microsoft.com/office/drawing/2014/main" xmlns="" id="{D230392C-ED50-49C3-93A6-10868BF6DADE}"/>
               </a:ext>
             </a:extLst>
           </p:cNvPr>
@@ -5645,7 +5645,7 @@
           <p:cNvPr id="6146" name="幻灯片图像占位符 1">
             <a:extLst>
               <a:ext uri="{FF2B5EF4-FFF2-40B4-BE49-F238E27FC236}">
-                <a16:creationId xmlns="" xmlns:a16="http://schemas.microsoft.com/office/drawing/2014/main" id="{4908B133-C54F-400F-8F70-355C57C0BE11}"/>
+                <a16:creationId xmlns:a16="http://schemas.microsoft.com/office/drawing/2014/main" xmlns="" id="{4908B133-C54F-400F-8F70-355C57C0BE11}"/>
               </a:ext>
             </a:extLst>
           </p:cNvPr>
@@ -5682,7 +5682,7 @@
           <p:cNvPr id="6147" name="备注占位符 2">
             <a:extLst>
               <a:ext uri="{FF2B5EF4-FFF2-40B4-BE49-F238E27FC236}">
-                <a16:creationId xmlns="" xmlns:a16="http://schemas.microsoft.com/office/drawing/2014/main" id="{7D16C196-D24B-4BE0-AE74-D44907B2A1B1}"/>
+                <a16:creationId xmlns:a16="http://schemas.microsoft.com/office/drawing/2014/main" xmlns="" id="{7D16C196-D24B-4BE0-AE74-D44907B2A1B1}"/>
               </a:ext>
             </a:extLst>
           </p:cNvPr>
@@ -5737,7 +5737,7 @@
           <p:cNvPr id="6148" name="灯片编号占位符 3">
             <a:extLst>
               <a:ext uri="{FF2B5EF4-FFF2-40B4-BE49-F238E27FC236}">
-                <a16:creationId xmlns="" xmlns:a16="http://schemas.microsoft.com/office/drawing/2014/main" id="{D230392C-ED50-49C3-93A6-10868BF6DADE}"/>
+                <a16:creationId xmlns:a16="http://schemas.microsoft.com/office/drawing/2014/main" xmlns="" id="{D230392C-ED50-49C3-93A6-10868BF6DADE}"/>
               </a:ext>
             </a:extLst>
           </p:cNvPr>
@@ -5987,7 +5987,7 @@
           <p:cNvPr id="6146" name="幻灯片图像占位符 1">
             <a:extLst>
               <a:ext uri="{FF2B5EF4-FFF2-40B4-BE49-F238E27FC236}">
-                <a16:creationId xmlns="" xmlns:a16="http://schemas.microsoft.com/office/drawing/2014/main" id="{4908B133-C54F-400F-8F70-355C57C0BE11}"/>
+                <a16:creationId xmlns:a16="http://schemas.microsoft.com/office/drawing/2014/main" xmlns="" id="{4908B133-C54F-400F-8F70-355C57C0BE11}"/>
               </a:ext>
             </a:extLst>
           </p:cNvPr>
@@ -6024,7 +6024,7 @@
           <p:cNvPr id="6147" name="备注占位符 2">
             <a:extLst>
               <a:ext uri="{FF2B5EF4-FFF2-40B4-BE49-F238E27FC236}">
-                <a16:creationId xmlns="" xmlns:a16="http://schemas.microsoft.com/office/drawing/2014/main" id="{7D16C196-D24B-4BE0-AE74-D44907B2A1B1}"/>
+                <a16:creationId xmlns:a16="http://schemas.microsoft.com/office/drawing/2014/main" xmlns="" id="{7D16C196-D24B-4BE0-AE74-D44907B2A1B1}"/>
               </a:ext>
             </a:extLst>
           </p:cNvPr>
@@ -6079,7 +6079,7 @@
           <p:cNvPr id="6148" name="灯片编号占位符 3">
             <a:extLst>
               <a:ext uri="{FF2B5EF4-FFF2-40B4-BE49-F238E27FC236}">
-                <a16:creationId xmlns="" xmlns:a16="http://schemas.microsoft.com/office/drawing/2014/main" id="{D230392C-ED50-49C3-93A6-10868BF6DADE}"/>
+                <a16:creationId xmlns:a16="http://schemas.microsoft.com/office/drawing/2014/main" xmlns="" id="{D230392C-ED50-49C3-93A6-10868BF6DADE}"/>
               </a:ext>
             </a:extLst>
           </p:cNvPr>
@@ -6329,7 +6329,7 @@
           <p:cNvPr id="6146" name="幻灯片图像占位符 1">
             <a:extLst>
               <a:ext uri="{FF2B5EF4-FFF2-40B4-BE49-F238E27FC236}">
-                <a16:creationId xmlns="" xmlns:a16="http://schemas.microsoft.com/office/drawing/2014/main" id="{4908B133-C54F-400F-8F70-355C57C0BE11}"/>
+                <a16:creationId xmlns:a16="http://schemas.microsoft.com/office/drawing/2014/main" xmlns="" id="{4908B133-C54F-400F-8F70-355C57C0BE11}"/>
               </a:ext>
             </a:extLst>
           </p:cNvPr>
@@ -6366,7 +6366,7 @@
           <p:cNvPr id="6147" name="备注占位符 2">
             <a:extLst>
               <a:ext uri="{FF2B5EF4-FFF2-40B4-BE49-F238E27FC236}">
-                <a16:creationId xmlns="" xmlns:a16="http://schemas.microsoft.com/office/drawing/2014/main" id="{7D16C196-D24B-4BE0-AE74-D44907B2A1B1}"/>
+                <a16:creationId xmlns:a16="http://schemas.microsoft.com/office/drawing/2014/main" xmlns="" id="{7D16C196-D24B-4BE0-AE74-D44907B2A1B1}"/>
               </a:ext>
             </a:extLst>
           </p:cNvPr>
@@ -6421,7 +6421,7 @@
           <p:cNvPr id="6148" name="灯片编号占位符 3">
             <a:extLst>
               <a:ext uri="{FF2B5EF4-FFF2-40B4-BE49-F238E27FC236}">
-                <a16:creationId xmlns="" xmlns:a16="http://schemas.microsoft.com/office/drawing/2014/main" id="{D230392C-ED50-49C3-93A6-10868BF6DADE}"/>
+                <a16:creationId xmlns:a16="http://schemas.microsoft.com/office/drawing/2014/main" xmlns="" id="{D230392C-ED50-49C3-93A6-10868BF6DADE}"/>
               </a:ext>
             </a:extLst>
           </p:cNvPr>
@@ -6671,7 +6671,7 @@
           <p:cNvPr id="6146" name="幻灯片图像占位符 1">
             <a:extLst>
               <a:ext uri="{FF2B5EF4-FFF2-40B4-BE49-F238E27FC236}">
-                <a16:creationId xmlns="" xmlns:a16="http://schemas.microsoft.com/office/drawing/2014/main" id="{4908B133-C54F-400F-8F70-355C57C0BE11}"/>
+                <a16:creationId xmlns:a16="http://schemas.microsoft.com/office/drawing/2014/main" xmlns="" id="{4908B133-C54F-400F-8F70-355C57C0BE11}"/>
               </a:ext>
             </a:extLst>
           </p:cNvPr>
@@ -6708,7 +6708,7 @@
           <p:cNvPr id="6147" name="备注占位符 2">
             <a:extLst>
               <a:ext uri="{FF2B5EF4-FFF2-40B4-BE49-F238E27FC236}">
-                <a16:creationId xmlns="" xmlns:a16="http://schemas.microsoft.com/office/drawing/2014/main" id="{7D16C196-D24B-4BE0-AE74-D44907B2A1B1}"/>
+                <a16:creationId xmlns:a16="http://schemas.microsoft.com/office/drawing/2014/main" xmlns="" id="{7D16C196-D24B-4BE0-AE74-D44907B2A1B1}"/>
               </a:ext>
             </a:extLst>
           </p:cNvPr>
@@ -6763,7 +6763,7 @@
           <p:cNvPr id="6148" name="灯片编号占位符 3">
             <a:extLst>
               <a:ext uri="{FF2B5EF4-FFF2-40B4-BE49-F238E27FC236}">
-                <a16:creationId xmlns="" xmlns:a16="http://schemas.microsoft.com/office/drawing/2014/main" id="{D230392C-ED50-49C3-93A6-10868BF6DADE}"/>
+                <a16:creationId xmlns:a16="http://schemas.microsoft.com/office/drawing/2014/main" xmlns="" id="{D230392C-ED50-49C3-93A6-10868BF6DADE}"/>
               </a:ext>
             </a:extLst>
           </p:cNvPr>
@@ -7013,7 +7013,7 @@
           <p:cNvPr id="6146" name="幻灯片图像占位符 1">
             <a:extLst>
               <a:ext uri="{FF2B5EF4-FFF2-40B4-BE49-F238E27FC236}">
-                <a16:creationId xmlns="" xmlns:a16="http://schemas.microsoft.com/office/drawing/2014/main" id="{4908B133-C54F-400F-8F70-355C57C0BE11}"/>
+                <a16:creationId xmlns:a16="http://schemas.microsoft.com/office/drawing/2014/main" xmlns="" id="{4908B133-C54F-400F-8F70-355C57C0BE11}"/>
               </a:ext>
             </a:extLst>
           </p:cNvPr>
@@ -7050,7 +7050,7 @@
           <p:cNvPr id="6147" name="备注占位符 2">
             <a:extLst>
               <a:ext uri="{FF2B5EF4-FFF2-40B4-BE49-F238E27FC236}">
-                <a16:creationId xmlns="" xmlns:a16="http://schemas.microsoft.com/office/drawing/2014/main" id="{7D16C196-D24B-4BE0-AE74-D44907B2A1B1}"/>
+                <a16:creationId xmlns:a16="http://schemas.microsoft.com/office/drawing/2014/main" xmlns="" id="{7D16C196-D24B-4BE0-AE74-D44907B2A1B1}"/>
               </a:ext>
             </a:extLst>
           </p:cNvPr>
@@ -7105,7 +7105,7 @@
           <p:cNvPr id="6148" name="灯片编号占位符 3">
             <a:extLst>
               <a:ext uri="{FF2B5EF4-FFF2-40B4-BE49-F238E27FC236}">
-                <a16:creationId xmlns="" xmlns:a16="http://schemas.microsoft.com/office/drawing/2014/main" id="{D230392C-ED50-49C3-93A6-10868BF6DADE}"/>
+                <a16:creationId xmlns:a16="http://schemas.microsoft.com/office/drawing/2014/main" xmlns="" id="{D230392C-ED50-49C3-93A6-10868BF6DADE}"/>
               </a:ext>
             </a:extLst>
           </p:cNvPr>
@@ -7355,7 +7355,7 @@
           <p:cNvPr id="6146" name="幻灯片图像占位符 1">
             <a:extLst>
               <a:ext uri="{FF2B5EF4-FFF2-40B4-BE49-F238E27FC236}">
-                <a16:creationId xmlns="" xmlns:a16="http://schemas.microsoft.com/office/drawing/2014/main" id="{4908B133-C54F-400F-8F70-355C57C0BE11}"/>
+                <a16:creationId xmlns:a16="http://schemas.microsoft.com/office/drawing/2014/main" xmlns="" id="{4908B133-C54F-400F-8F70-355C57C0BE11}"/>
               </a:ext>
             </a:extLst>
           </p:cNvPr>
@@ -7392,7 +7392,7 @@
           <p:cNvPr id="6147" name="备注占位符 2">
             <a:extLst>
               <a:ext uri="{FF2B5EF4-FFF2-40B4-BE49-F238E27FC236}">
-                <a16:creationId xmlns="" xmlns:a16="http://schemas.microsoft.com/office/drawing/2014/main" id="{7D16C196-D24B-4BE0-AE74-D44907B2A1B1}"/>
+                <a16:creationId xmlns:a16="http://schemas.microsoft.com/office/drawing/2014/main" xmlns="" id="{7D16C196-D24B-4BE0-AE74-D44907B2A1B1}"/>
               </a:ext>
             </a:extLst>
           </p:cNvPr>
@@ -7447,7 +7447,7 @@
           <p:cNvPr id="6148" name="灯片编号占位符 3">
             <a:extLst>
               <a:ext uri="{FF2B5EF4-FFF2-40B4-BE49-F238E27FC236}">
-                <a16:creationId xmlns="" xmlns:a16="http://schemas.microsoft.com/office/drawing/2014/main" id="{D230392C-ED50-49C3-93A6-10868BF6DADE}"/>
+                <a16:creationId xmlns:a16="http://schemas.microsoft.com/office/drawing/2014/main" xmlns="" id="{D230392C-ED50-49C3-93A6-10868BF6DADE}"/>
               </a:ext>
             </a:extLst>
           </p:cNvPr>
@@ -7697,7 +7697,7 @@
           <p:cNvPr id="6146" name="幻灯片图像占位符 1">
             <a:extLst>
               <a:ext uri="{FF2B5EF4-FFF2-40B4-BE49-F238E27FC236}">
-                <a16:creationId xmlns="" xmlns:a16="http://schemas.microsoft.com/office/drawing/2014/main" id="{4908B133-C54F-400F-8F70-355C57C0BE11}"/>
+                <a16:creationId xmlns:a16="http://schemas.microsoft.com/office/drawing/2014/main" xmlns="" id="{4908B133-C54F-400F-8F70-355C57C0BE11}"/>
               </a:ext>
             </a:extLst>
           </p:cNvPr>
@@ -7734,7 +7734,7 @@
           <p:cNvPr id="6147" name="备注占位符 2">
             <a:extLst>
               <a:ext uri="{FF2B5EF4-FFF2-40B4-BE49-F238E27FC236}">
-                <a16:creationId xmlns="" xmlns:a16="http://schemas.microsoft.com/office/drawing/2014/main" id="{7D16C196-D24B-4BE0-AE74-D44907B2A1B1}"/>
+                <a16:creationId xmlns:a16="http://schemas.microsoft.com/office/drawing/2014/main" xmlns="" id="{7D16C196-D24B-4BE0-AE74-D44907B2A1B1}"/>
               </a:ext>
             </a:extLst>
           </p:cNvPr>
@@ -7789,7 +7789,7 @@
           <p:cNvPr id="6148" name="灯片编号占位符 3">
             <a:extLst>
               <a:ext uri="{FF2B5EF4-FFF2-40B4-BE49-F238E27FC236}">
-                <a16:creationId xmlns="" xmlns:a16="http://schemas.microsoft.com/office/drawing/2014/main" id="{D230392C-ED50-49C3-93A6-10868BF6DADE}"/>
+                <a16:creationId xmlns:a16="http://schemas.microsoft.com/office/drawing/2014/main" xmlns="" id="{D230392C-ED50-49C3-93A6-10868BF6DADE}"/>
               </a:ext>
             </a:extLst>
           </p:cNvPr>
@@ -8039,7 +8039,7 @@
           <p:cNvPr id="6146" name="幻灯片图像占位符 1">
             <a:extLst>
               <a:ext uri="{FF2B5EF4-FFF2-40B4-BE49-F238E27FC236}">
-                <a16:creationId xmlns="" xmlns:a16="http://schemas.microsoft.com/office/drawing/2014/main" id="{4908B133-C54F-400F-8F70-355C57C0BE11}"/>
+                <a16:creationId xmlns:a16="http://schemas.microsoft.com/office/drawing/2014/main" xmlns="" id="{4908B133-C54F-400F-8F70-355C57C0BE11}"/>
               </a:ext>
             </a:extLst>
           </p:cNvPr>
@@ -8076,7 +8076,7 @@
           <p:cNvPr id="6147" name="备注占位符 2">
             <a:extLst>
               <a:ext uri="{FF2B5EF4-FFF2-40B4-BE49-F238E27FC236}">
-                <a16:creationId xmlns="" xmlns:a16="http://schemas.microsoft.com/office/drawing/2014/main" id="{7D16C196-D24B-4BE0-AE74-D44907B2A1B1}"/>
+                <a16:creationId xmlns:a16="http://schemas.microsoft.com/office/drawing/2014/main" xmlns="" id="{7D16C196-D24B-4BE0-AE74-D44907B2A1B1}"/>
               </a:ext>
             </a:extLst>
           </p:cNvPr>
@@ -8131,7 +8131,7 @@
           <p:cNvPr id="6148" name="灯片编号占位符 3">
             <a:extLst>
               <a:ext uri="{FF2B5EF4-FFF2-40B4-BE49-F238E27FC236}">
-                <a16:creationId xmlns="" xmlns:a16="http://schemas.microsoft.com/office/drawing/2014/main" id="{D230392C-ED50-49C3-93A6-10868BF6DADE}"/>
+                <a16:creationId xmlns:a16="http://schemas.microsoft.com/office/drawing/2014/main" xmlns="" id="{D230392C-ED50-49C3-93A6-10868BF6DADE}"/>
               </a:ext>
             </a:extLst>
           </p:cNvPr>
@@ -8381,7 +8381,7 @@
           <p:cNvPr id="6146" name="幻灯片图像占位符 1">
             <a:extLst>
               <a:ext uri="{FF2B5EF4-FFF2-40B4-BE49-F238E27FC236}">
-                <a16:creationId xmlns="" xmlns:a16="http://schemas.microsoft.com/office/drawing/2014/main" id="{4908B133-C54F-400F-8F70-355C57C0BE11}"/>
+                <a16:creationId xmlns:a16="http://schemas.microsoft.com/office/drawing/2014/main" xmlns="" id="{4908B133-C54F-400F-8F70-355C57C0BE11}"/>
               </a:ext>
             </a:extLst>
           </p:cNvPr>
@@ -8418,7 +8418,7 @@
           <p:cNvPr id="6147" name="备注占位符 2">
             <a:extLst>
               <a:ext uri="{FF2B5EF4-FFF2-40B4-BE49-F238E27FC236}">
-                <a16:creationId xmlns="" xmlns:a16="http://schemas.microsoft.com/office/drawing/2014/main" id="{7D16C196-D24B-4BE0-AE74-D44907B2A1B1}"/>
+                <a16:creationId xmlns:a16="http://schemas.microsoft.com/office/drawing/2014/main" xmlns="" id="{7D16C196-D24B-4BE0-AE74-D44907B2A1B1}"/>
               </a:ext>
             </a:extLst>
           </p:cNvPr>
@@ -8473,7 +8473,7 @@
           <p:cNvPr id="6148" name="灯片编号占位符 3">
             <a:extLst>
               <a:ext uri="{FF2B5EF4-FFF2-40B4-BE49-F238E27FC236}">
-                <a16:creationId xmlns="" xmlns:a16="http://schemas.microsoft.com/office/drawing/2014/main" id="{D230392C-ED50-49C3-93A6-10868BF6DADE}"/>
+                <a16:creationId xmlns:a16="http://schemas.microsoft.com/office/drawing/2014/main" xmlns="" id="{D230392C-ED50-49C3-93A6-10868BF6DADE}"/>
               </a:ext>
             </a:extLst>
           </p:cNvPr>
@@ -8723,7 +8723,7 @@
           <p:cNvPr id="6146" name="幻灯片图像占位符 1">
             <a:extLst>
               <a:ext uri="{FF2B5EF4-FFF2-40B4-BE49-F238E27FC236}">
-                <a16:creationId xmlns="" xmlns:a16="http://schemas.microsoft.com/office/drawing/2014/main" id="{4908B133-C54F-400F-8F70-355C57C0BE11}"/>
+                <a16:creationId xmlns:a16="http://schemas.microsoft.com/office/drawing/2014/main" xmlns="" id="{4908B133-C54F-400F-8F70-355C57C0BE11}"/>
               </a:ext>
             </a:extLst>
           </p:cNvPr>
@@ -8760,7 +8760,7 @@
           <p:cNvPr id="6147" name="备注占位符 2">
             <a:extLst>
               <a:ext uri="{FF2B5EF4-FFF2-40B4-BE49-F238E27FC236}">
-                <a16:creationId xmlns="" xmlns:a16="http://schemas.microsoft.com/office/drawing/2014/main" id="{7D16C196-D24B-4BE0-AE74-D44907B2A1B1}"/>
+                <a16:creationId xmlns:a16="http://schemas.microsoft.com/office/drawing/2014/main" xmlns="" id="{7D16C196-D24B-4BE0-AE74-D44907B2A1B1}"/>
               </a:ext>
             </a:extLst>
           </p:cNvPr>
@@ -8815,7 +8815,7 @@
           <p:cNvPr id="6148" name="灯片编号占位符 3">
             <a:extLst>
               <a:ext uri="{FF2B5EF4-FFF2-40B4-BE49-F238E27FC236}">
-                <a16:creationId xmlns="" xmlns:a16="http://schemas.microsoft.com/office/drawing/2014/main" id="{D230392C-ED50-49C3-93A6-10868BF6DADE}"/>
+                <a16:creationId xmlns:a16="http://schemas.microsoft.com/office/drawing/2014/main" xmlns="" id="{D230392C-ED50-49C3-93A6-10868BF6DADE}"/>
               </a:ext>
             </a:extLst>
           </p:cNvPr>
@@ -9065,7 +9065,7 @@
           <p:cNvPr id="6146" name="幻灯片图像占位符 1">
             <a:extLst>
               <a:ext uri="{FF2B5EF4-FFF2-40B4-BE49-F238E27FC236}">
-                <a16:creationId xmlns="" xmlns:a16="http://schemas.microsoft.com/office/drawing/2014/main" id="{4908B133-C54F-400F-8F70-355C57C0BE11}"/>
+                <a16:creationId xmlns:a16="http://schemas.microsoft.com/office/drawing/2014/main" xmlns="" id="{4908B133-C54F-400F-8F70-355C57C0BE11}"/>
               </a:ext>
             </a:extLst>
           </p:cNvPr>
@@ -9102,7 +9102,7 @@
           <p:cNvPr id="6147" name="备注占位符 2">
             <a:extLst>
               <a:ext uri="{FF2B5EF4-FFF2-40B4-BE49-F238E27FC236}">
-                <a16:creationId xmlns="" xmlns:a16="http://schemas.microsoft.com/office/drawing/2014/main" id="{7D16C196-D24B-4BE0-AE74-D44907B2A1B1}"/>
+                <a16:creationId xmlns:a16="http://schemas.microsoft.com/office/drawing/2014/main" xmlns="" id="{7D16C196-D24B-4BE0-AE74-D44907B2A1B1}"/>
               </a:ext>
             </a:extLst>
           </p:cNvPr>
@@ -9157,7 +9157,7 @@
           <p:cNvPr id="6148" name="灯片编号占位符 3">
             <a:extLst>
               <a:ext uri="{FF2B5EF4-FFF2-40B4-BE49-F238E27FC236}">
-                <a16:creationId xmlns="" xmlns:a16="http://schemas.microsoft.com/office/drawing/2014/main" id="{D230392C-ED50-49C3-93A6-10868BF6DADE}"/>
+                <a16:creationId xmlns:a16="http://schemas.microsoft.com/office/drawing/2014/main" xmlns="" id="{D230392C-ED50-49C3-93A6-10868BF6DADE}"/>
               </a:ext>
             </a:extLst>
           </p:cNvPr>
@@ -9407,7 +9407,7 @@
           <p:cNvPr id="6146" name="幻灯片图像占位符 1">
             <a:extLst>
               <a:ext uri="{FF2B5EF4-FFF2-40B4-BE49-F238E27FC236}">
-                <a16:creationId xmlns="" xmlns:a16="http://schemas.microsoft.com/office/drawing/2014/main" id="{4908B133-C54F-400F-8F70-355C57C0BE11}"/>
+                <a16:creationId xmlns:a16="http://schemas.microsoft.com/office/drawing/2014/main" xmlns="" id="{4908B133-C54F-400F-8F70-355C57C0BE11}"/>
               </a:ext>
             </a:extLst>
           </p:cNvPr>
@@ -9444,7 +9444,7 @@
           <p:cNvPr id="6147" name="备注占位符 2">
             <a:extLst>
               <a:ext uri="{FF2B5EF4-FFF2-40B4-BE49-F238E27FC236}">
-                <a16:creationId xmlns="" xmlns:a16="http://schemas.microsoft.com/office/drawing/2014/main" id="{7D16C196-D24B-4BE0-AE74-D44907B2A1B1}"/>
+                <a16:creationId xmlns:a16="http://schemas.microsoft.com/office/drawing/2014/main" xmlns="" id="{7D16C196-D24B-4BE0-AE74-D44907B2A1B1}"/>
               </a:ext>
             </a:extLst>
           </p:cNvPr>
@@ -9499,7 +9499,7 @@
           <p:cNvPr id="6148" name="灯片编号占位符 3">
             <a:extLst>
               <a:ext uri="{FF2B5EF4-FFF2-40B4-BE49-F238E27FC236}">
-                <a16:creationId xmlns="" xmlns:a16="http://schemas.microsoft.com/office/drawing/2014/main" id="{D230392C-ED50-49C3-93A6-10868BF6DADE}"/>
+                <a16:creationId xmlns:a16="http://schemas.microsoft.com/office/drawing/2014/main" xmlns="" id="{D230392C-ED50-49C3-93A6-10868BF6DADE}"/>
               </a:ext>
             </a:extLst>
           </p:cNvPr>
@@ -9749,7 +9749,7 @@
           <p:cNvPr id="6146" name="幻灯片图像占位符 1">
             <a:extLst>
               <a:ext uri="{FF2B5EF4-FFF2-40B4-BE49-F238E27FC236}">
-                <a16:creationId xmlns="" xmlns:a16="http://schemas.microsoft.com/office/drawing/2014/main" id="{4908B133-C54F-400F-8F70-355C57C0BE11}"/>
+                <a16:creationId xmlns:a16="http://schemas.microsoft.com/office/drawing/2014/main" xmlns="" id="{4908B133-C54F-400F-8F70-355C57C0BE11}"/>
               </a:ext>
             </a:extLst>
           </p:cNvPr>
@@ -9786,7 +9786,7 @@
           <p:cNvPr id="6147" name="备注占位符 2">
             <a:extLst>
               <a:ext uri="{FF2B5EF4-FFF2-40B4-BE49-F238E27FC236}">
-                <a16:creationId xmlns="" xmlns:a16="http://schemas.microsoft.com/office/drawing/2014/main" id="{7D16C196-D24B-4BE0-AE74-D44907B2A1B1}"/>
+                <a16:creationId xmlns:a16="http://schemas.microsoft.com/office/drawing/2014/main" xmlns="" id="{7D16C196-D24B-4BE0-AE74-D44907B2A1B1}"/>
               </a:ext>
             </a:extLst>
           </p:cNvPr>
@@ -9841,7 +9841,7 @@
           <p:cNvPr id="6148" name="灯片编号占位符 3">
             <a:extLst>
               <a:ext uri="{FF2B5EF4-FFF2-40B4-BE49-F238E27FC236}">
-                <a16:creationId xmlns="" xmlns:a16="http://schemas.microsoft.com/office/drawing/2014/main" id="{D230392C-ED50-49C3-93A6-10868BF6DADE}"/>
+                <a16:creationId xmlns:a16="http://schemas.microsoft.com/office/drawing/2014/main" xmlns="" id="{D230392C-ED50-49C3-93A6-10868BF6DADE}"/>
               </a:ext>
             </a:extLst>
           </p:cNvPr>
@@ -10091,7 +10091,7 @@
           <p:cNvPr id="6146" name="幻灯片图像占位符 1">
             <a:extLst>
               <a:ext uri="{FF2B5EF4-FFF2-40B4-BE49-F238E27FC236}">
-                <a16:creationId xmlns="" xmlns:a16="http://schemas.microsoft.com/office/drawing/2014/main" id="{4908B133-C54F-400F-8F70-355C57C0BE11}"/>
+                <a16:creationId xmlns:a16="http://schemas.microsoft.com/office/drawing/2014/main" xmlns="" id="{4908B133-C54F-400F-8F70-355C57C0BE11}"/>
               </a:ext>
             </a:extLst>
           </p:cNvPr>
@@ -10128,7 +10128,7 @@
           <p:cNvPr id="6147" name="备注占位符 2">
             <a:extLst>
               <a:ext uri="{FF2B5EF4-FFF2-40B4-BE49-F238E27FC236}">
-                <a16:creationId xmlns="" xmlns:a16="http://schemas.microsoft.com/office/drawing/2014/main" id="{7D16C196-D24B-4BE0-AE74-D44907B2A1B1}"/>
+                <a16:creationId xmlns:a16="http://schemas.microsoft.com/office/drawing/2014/main" xmlns="" id="{7D16C196-D24B-4BE0-AE74-D44907B2A1B1}"/>
               </a:ext>
             </a:extLst>
           </p:cNvPr>
@@ -10183,7 +10183,7 @@
           <p:cNvPr id="6148" name="灯片编号占位符 3">
             <a:extLst>
               <a:ext uri="{FF2B5EF4-FFF2-40B4-BE49-F238E27FC236}">
-                <a16:creationId xmlns="" xmlns:a16="http://schemas.microsoft.com/office/drawing/2014/main" id="{D230392C-ED50-49C3-93A6-10868BF6DADE}"/>
+                <a16:creationId xmlns:a16="http://schemas.microsoft.com/office/drawing/2014/main" xmlns="" id="{D230392C-ED50-49C3-93A6-10868BF6DADE}"/>
               </a:ext>
             </a:extLst>
           </p:cNvPr>
@@ -10433,7 +10433,7 @@
           <p:cNvPr id="6146" name="幻灯片图像占位符 1">
             <a:extLst>
               <a:ext uri="{FF2B5EF4-FFF2-40B4-BE49-F238E27FC236}">
-                <a16:creationId xmlns="" xmlns:a16="http://schemas.microsoft.com/office/drawing/2014/main" id="{4908B133-C54F-400F-8F70-355C57C0BE11}"/>
+                <a16:creationId xmlns:a16="http://schemas.microsoft.com/office/drawing/2014/main" xmlns="" id="{4908B133-C54F-400F-8F70-355C57C0BE11}"/>
               </a:ext>
             </a:extLst>
           </p:cNvPr>
@@ -10470,7 +10470,7 @@
           <p:cNvPr id="6147" name="备注占位符 2">
             <a:extLst>
               <a:ext uri="{FF2B5EF4-FFF2-40B4-BE49-F238E27FC236}">
-                <a16:creationId xmlns="" xmlns:a16="http://schemas.microsoft.com/office/drawing/2014/main" id="{7D16C196-D24B-4BE0-AE74-D44907B2A1B1}"/>
+                <a16:creationId xmlns:a16="http://schemas.microsoft.com/office/drawing/2014/main" xmlns="" id="{7D16C196-D24B-4BE0-AE74-D44907B2A1B1}"/>
               </a:ext>
             </a:extLst>
           </p:cNvPr>
@@ -10525,7 +10525,7 @@
           <p:cNvPr id="6148" name="灯片编号占位符 3">
             <a:extLst>
               <a:ext uri="{FF2B5EF4-FFF2-40B4-BE49-F238E27FC236}">
-                <a16:creationId xmlns="" xmlns:a16="http://schemas.microsoft.com/office/drawing/2014/main" id="{D230392C-ED50-49C3-93A6-10868BF6DADE}"/>
+                <a16:creationId xmlns:a16="http://schemas.microsoft.com/office/drawing/2014/main" xmlns="" id="{D230392C-ED50-49C3-93A6-10868BF6DADE}"/>
               </a:ext>
             </a:extLst>
           </p:cNvPr>
@@ -10775,7 +10775,7 @@
           <p:cNvPr id="2" name="标题 1">
             <a:extLst>
               <a:ext uri="{FF2B5EF4-FFF2-40B4-BE49-F238E27FC236}">
-                <a16:creationId xmlns="" xmlns:a16="http://schemas.microsoft.com/office/drawing/2014/main" id="{558AFC1F-0EC5-49BF-9268-F0FEE4B60F85}"/>
+                <a16:creationId xmlns:a16="http://schemas.microsoft.com/office/drawing/2014/main" xmlns="" id="{558AFC1F-0EC5-49BF-9268-F0FEE4B60F85}"/>
               </a:ext>
             </a:extLst>
           </p:cNvPr>
@@ -10812,7 +10812,7 @@
           <p:cNvPr id="3" name="副标题 2">
             <a:extLst>
               <a:ext uri="{FF2B5EF4-FFF2-40B4-BE49-F238E27FC236}">
-                <a16:creationId xmlns="" xmlns:a16="http://schemas.microsoft.com/office/drawing/2014/main" id="{411F25FC-AA7A-420B-9A3A-84ECEF4013AF}"/>
+                <a16:creationId xmlns:a16="http://schemas.microsoft.com/office/drawing/2014/main" xmlns="" id="{411F25FC-AA7A-420B-9A3A-84ECEF4013AF}"/>
               </a:ext>
             </a:extLst>
           </p:cNvPr>
@@ -10882,7 +10882,7 @@
           <p:cNvPr id="4" name="Rectangle 4">
             <a:extLst>
               <a:ext uri="{FF2B5EF4-FFF2-40B4-BE49-F238E27FC236}">
-                <a16:creationId xmlns="" xmlns:a16="http://schemas.microsoft.com/office/drawing/2014/main" id="{892DDA44-EBAA-4B0D-B1AD-17FC12E24344}"/>
+                <a16:creationId xmlns:a16="http://schemas.microsoft.com/office/drawing/2014/main" xmlns="" id="{892DDA44-EBAA-4B0D-B1AD-17FC12E24344}"/>
               </a:ext>
             </a:extLst>
           </p:cNvPr>
@@ -10916,7 +10916,7 @@
           <p:cNvPr id="5" name="Rectangle 5">
             <a:extLst>
               <a:ext uri="{FF2B5EF4-FFF2-40B4-BE49-F238E27FC236}">
-                <a16:creationId xmlns="" xmlns:a16="http://schemas.microsoft.com/office/drawing/2014/main" id="{59A68DBD-F8D1-4CAE-ACF1-A66E61D864F9}"/>
+                <a16:creationId xmlns:a16="http://schemas.microsoft.com/office/drawing/2014/main" xmlns="" id="{59A68DBD-F8D1-4CAE-ACF1-A66E61D864F9}"/>
               </a:ext>
             </a:extLst>
           </p:cNvPr>
@@ -10950,7 +10950,7 @@
           <p:cNvPr id="6" name="Rectangle 6">
             <a:extLst>
               <a:ext uri="{FF2B5EF4-FFF2-40B4-BE49-F238E27FC236}">
-                <a16:creationId xmlns="" xmlns:a16="http://schemas.microsoft.com/office/drawing/2014/main" id="{A406CACD-345F-48D9-9536-018A859493C9}"/>
+                <a16:creationId xmlns:a16="http://schemas.microsoft.com/office/drawing/2014/main" xmlns="" id="{A406CACD-345F-48D9-9536-018A859493C9}"/>
               </a:ext>
             </a:extLst>
           </p:cNvPr>
@@ -11021,7 +11021,7 @@
           <p:cNvPr id="2" name="标题 1">
             <a:extLst>
               <a:ext uri="{FF2B5EF4-FFF2-40B4-BE49-F238E27FC236}">
-                <a16:creationId xmlns="" xmlns:a16="http://schemas.microsoft.com/office/drawing/2014/main" id="{413EF4AD-90B9-4E2D-B48C-D5D41ADC00B1}"/>
+                <a16:creationId xmlns:a16="http://schemas.microsoft.com/office/drawing/2014/main" xmlns="" id="{413EF4AD-90B9-4E2D-B48C-D5D41ADC00B1}"/>
               </a:ext>
             </a:extLst>
           </p:cNvPr>
@@ -11049,7 +11049,7 @@
           <p:cNvPr id="3" name="竖排文字占位符 2">
             <a:extLst>
               <a:ext uri="{FF2B5EF4-FFF2-40B4-BE49-F238E27FC236}">
-                <a16:creationId xmlns="" xmlns:a16="http://schemas.microsoft.com/office/drawing/2014/main" id="{2935463B-296C-4D20-B55D-237CE160497F}"/>
+                <a16:creationId xmlns:a16="http://schemas.microsoft.com/office/drawing/2014/main" xmlns="" id="{2935463B-296C-4D20-B55D-237CE160497F}"/>
               </a:ext>
             </a:extLst>
           </p:cNvPr>
@@ -11106,7 +11106,7 @@
           <p:cNvPr id="4" name="Rectangle 4">
             <a:extLst>
               <a:ext uri="{FF2B5EF4-FFF2-40B4-BE49-F238E27FC236}">
-                <a16:creationId xmlns="" xmlns:a16="http://schemas.microsoft.com/office/drawing/2014/main" id="{1572E583-F505-4444-906F-8206A9EE7F1E}"/>
+                <a16:creationId xmlns:a16="http://schemas.microsoft.com/office/drawing/2014/main" xmlns="" id="{1572E583-F505-4444-906F-8206A9EE7F1E}"/>
               </a:ext>
             </a:extLst>
           </p:cNvPr>
@@ -11140,7 +11140,7 @@
           <p:cNvPr id="5" name="Rectangle 5">
             <a:extLst>
               <a:ext uri="{FF2B5EF4-FFF2-40B4-BE49-F238E27FC236}">
-                <a16:creationId xmlns="" xmlns:a16="http://schemas.microsoft.com/office/drawing/2014/main" id="{59D895F1-9DF8-48A9-9C6A-3A7AC93DF390}"/>
+                <a16:creationId xmlns:a16="http://schemas.microsoft.com/office/drawing/2014/main" xmlns="" id="{59D895F1-9DF8-48A9-9C6A-3A7AC93DF390}"/>
               </a:ext>
             </a:extLst>
           </p:cNvPr>
@@ -11174,7 +11174,7 @@
           <p:cNvPr id="6" name="Rectangle 6">
             <a:extLst>
               <a:ext uri="{FF2B5EF4-FFF2-40B4-BE49-F238E27FC236}">
-                <a16:creationId xmlns="" xmlns:a16="http://schemas.microsoft.com/office/drawing/2014/main" id="{291603C0-AEEF-495C-84B8-A97B75DBDA95}"/>
+                <a16:creationId xmlns:a16="http://schemas.microsoft.com/office/drawing/2014/main" xmlns="" id="{291603C0-AEEF-495C-84B8-A97B75DBDA95}"/>
               </a:ext>
             </a:extLst>
           </p:cNvPr>
@@ -11245,7 +11245,7 @@
           <p:cNvPr id="2" name="竖排标题 1">
             <a:extLst>
               <a:ext uri="{FF2B5EF4-FFF2-40B4-BE49-F238E27FC236}">
-                <a16:creationId xmlns="" xmlns:a16="http://schemas.microsoft.com/office/drawing/2014/main" id="{5C3D78EF-5EF5-478D-8576-1606D3C29178}"/>
+                <a16:creationId xmlns:a16="http://schemas.microsoft.com/office/drawing/2014/main" xmlns="" id="{5C3D78EF-5EF5-478D-8576-1606D3C29178}"/>
               </a:ext>
             </a:extLst>
           </p:cNvPr>
@@ -11278,7 +11278,7 @@
           <p:cNvPr id="3" name="竖排文字占位符 2">
             <a:extLst>
               <a:ext uri="{FF2B5EF4-FFF2-40B4-BE49-F238E27FC236}">
-                <a16:creationId xmlns="" xmlns:a16="http://schemas.microsoft.com/office/drawing/2014/main" id="{4DCD9F3D-20DB-4182-AD70-C533BC393EB5}"/>
+                <a16:creationId xmlns:a16="http://schemas.microsoft.com/office/drawing/2014/main" xmlns="" id="{4DCD9F3D-20DB-4182-AD70-C533BC393EB5}"/>
               </a:ext>
             </a:extLst>
           </p:cNvPr>
@@ -11340,7 +11340,7 @@
           <p:cNvPr id="4" name="Rectangle 4">
             <a:extLst>
               <a:ext uri="{FF2B5EF4-FFF2-40B4-BE49-F238E27FC236}">
-                <a16:creationId xmlns="" xmlns:a16="http://schemas.microsoft.com/office/drawing/2014/main" id="{80FCF88E-129A-43F9-90EC-1AB558A2726C}"/>
+                <a16:creationId xmlns:a16="http://schemas.microsoft.com/office/drawing/2014/main" xmlns="" id="{80FCF88E-129A-43F9-90EC-1AB558A2726C}"/>
               </a:ext>
             </a:extLst>
           </p:cNvPr>
@@ -11374,7 +11374,7 @@
           <p:cNvPr id="5" name="Rectangle 5">
             <a:extLst>
               <a:ext uri="{FF2B5EF4-FFF2-40B4-BE49-F238E27FC236}">
-                <a16:creationId xmlns="" xmlns:a16="http://schemas.microsoft.com/office/drawing/2014/main" id="{3124BE14-18C5-46A6-8BD5-794314EF816D}"/>
+                <a16:creationId xmlns:a16="http://schemas.microsoft.com/office/drawing/2014/main" xmlns="" id="{3124BE14-18C5-46A6-8BD5-794314EF816D}"/>
               </a:ext>
             </a:extLst>
           </p:cNvPr>
@@ -11408,7 +11408,7 @@
           <p:cNvPr id="6" name="Rectangle 6">
             <a:extLst>
               <a:ext uri="{FF2B5EF4-FFF2-40B4-BE49-F238E27FC236}">
-                <a16:creationId xmlns="" xmlns:a16="http://schemas.microsoft.com/office/drawing/2014/main" id="{597D6CFD-B5D7-46E4-8617-4E9947427CAF}"/>
+                <a16:creationId xmlns:a16="http://schemas.microsoft.com/office/drawing/2014/main" xmlns="" id="{597D6CFD-B5D7-46E4-8617-4E9947427CAF}"/>
               </a:ext>
             </a:extLst>
           </p:cNvPr>
@@ -11479,7 +11479,7 @@
           <p:cNvPr id="2" name="标题 1">
             <a:extLst>
               <a:ext uri="{FF2B5EF4-FFF2-40B4-BE49-F238E27FC236}">
-                <a16:creationId xmlns="" xmlns:a16="http://schemas.microsoft.com/office/drawing/2014/main" id="{79C7DECC-98E6-4FD9-AAA2-12B4A61F95C6}"/>
+                <a16:creationId xmlns:a16="http://schemas.microsoft.com/office/drawing/2014/main" xmlns="" id="{79C7DECC-98E6-4FD9-AAA2-12B4A61F95C6}"/>
               </a:ext>
             </a:extLst>
           </p:cNvPr>
@@ -11507,7 +11507,7 @@
           <p:cNvPr id="3" name="内容占位符 2">
             <a:extLst>
               <a:ext uri="{FF2B5EF4-FFF2-40B4-BE49-F238E27FC236}">
-                <a16:creationId xmlns="" xmlns:a16="http://schemas.microsoft.com/office/drawing/2014/main" id="{2DFFF49D-5346-4472-B7B4-2B4B12070C2F}"/>
+                <a16:creationId xmlns:a16="http://schemas.microsoft.com/office/drawing/2014/main" xmlns="" id="{2DFFF49D-5346-4472-B7B4-2B4B12070C2F}"/>
               </a:ext>
             </a:extLst>
           </p:cNvPr>
@@ -11564,7 +11564,7 @@
           <p:cNvPr id="4" name="Rectangle 4">
             <a:extLst>
               <a:ext uri="{FF2B5EF4-FFF2-40B4-BE49-F238E27FC236}">
-                <a16:creationId xmlns="" xmlns:a16="http://schemas.microsoft.com/office/drawing/2014/main" id="{3AE54C17-8281-4CEE-80BD-30C4F778807C}"/>
+                <a16:creationId xmlns:a16="http://schemas.microsoft.com/office/drawing/2014/main" xmlns="" id="{3AE54C17-8281-4CEE-80BD-30C4F778807C}"/>
               </a:ext>
             </a:extLst>
           </p:cNvPr>
@@ -11598,7 +11598,7 @@
           <p:cNvPr id="5" name="Rectangle 5">
             <a:extLst>
               <a:ext uri="{FF2B5EF4-FFF2-40B4-BE49-F238E27FC236}">
-                <a16:creationId xmlns="" xmlns:a16="http://schemas.microsoft.com/office/drawing/2014/main" id="{AA5AD5C1-CA4D-49A1-9F23-7E5608819125}"/>
+                <a16:creationId xmlns:a16="http://schemas.microsoft.com/office/drawing/2014/main" xmlns="" id="{AA5AD5C1-CA4D-49A1-9F23-7E5608819125}"/>
               </a:ext>
             </a:extLst>
           </p:cNvPr>
@@ -11632,7 +11632,7 @@
           <p:cNvPr id="6" name="Rectangle 6">
             <a:extLst>
               <a:ext uri="{FF2B5EF4-FFF2-40B4-BE49-F238E27FC236}">
-                <a16:creationId xmlns="" xmlns:a16="http://schemas.microsoft.com/office/drawing/2014/main" id="{89EA5E6E-1878-4876-87FC-34CF0D7DC10A}"/>
+                <a16:creationId xmlns:a16="http://schemas.microsoft.com/office/drawing/2014/main" xmlns="" id="{89EA5E6E-1878-4876-87FC-34CF0D7DC10A}"/>
               </a:ext>
             </a:extLst>
           </p:cNvPr>
@@ -11718,7 +11718,7 @@
           <p:cNvPr id="2" name="标题 1">
             <a:extLst>
               <a:ext uri="{FF2B5EF4-FFF2-40B4-BE49-F238E27FC236}">
-                <a16:creationId xmlns="" xmlns:a16="http://schemas.microsoft.com/office/drawing/2014/main" id="{D1C66AC4-7745-487C-B77E-D7209402F8D3}"/>
+                <a16:creationId xmlns:a16="http://schemas.microsoft.com/office/drawing/2014/main" xmlns="" id="{D1C66AC4-7745-487C-B77E-D7209402F8D3}"/>
               </a:ext>
             </a:extLst>
           </p:cNvPr>
@@ -11755,7 +11755,7 @@
           <p:cNvPr id="3" name="文本占位符 2">
             <a:extLst>
               <a:ext uri="{FF2B5EF4-FFF2-40B4-BE49-F238E27FC236}">
-                <a16:creationId xmlns="" xmlns:a16="http://schemas.microsoft.com/office/drawing/2014/main" id="{F0642504-C3D3-4FEB-932D-43E152422788}"/>
+                <a16:creationId xmlns:a16="http://schemas.microsoft.com/office/drawing/2014/main" xmlns="" id="{F0642504-C3D3-4FEB-932D-43E152422788}"/>
               </a:ext>
             </a:extLst>
           </p:cNvPr>
@@ -11826,7 +11826,7 @@
           <p:cNvPr id="4" name="Rectangle 4">
             <a:extLst>
               <a:ext uri="{FF2B5EF4-FFF2-40B4-BE49-F238E27FC236}">
-                <a16:creationId xmlns="" xmlns:a16="http://schemas.microsoft.com/office/drawing/2014/main" id="{1FDDD93F-F324-4F9A-B9D4-6849A4C3DA30}"/>
+                <a16:creationId xmlns:a16="http://schemas.microsoft.com/office/drawing/2014/main" xmlns="" id="{1FDDD93F-F324-4F9A-B9D4-6849A4C3DA30}"/>
               </a:ext>
             </a:extLst>
           </p:cNvPr>
@@ -11860,7 +11860,7 @@
           <p:cNvPr id="5" name="Rectangle 5">
             <a:extLst>
               <a:ext uri="{FF2B5EF4-FFF2-40B4-BE49-F238E27FC236}">
-                <a16:creationId xmlns="" xmlns:a16="http://schemas.microsoft.com/office/drawing/2014/main" id="{58D17B65-E136-4CDA-8948-06EE82F4BCF9}"/>
+                <a16:creationId xmlns:a16="http://schemas.microsoft.com/office/drawing/2014/main" xmlns="" id="{58D17B65-E136-4CDA-8948-06EE82F4BCF9}"/>
               </a:ext>
             </a:extLst>
           </p:cNvPr>
@@ -11894,7 +11894,7 @@
           <p:cNvPr id="6" name="Rectangle 6">
             <a:extLst>
               <a:ext uri="{FF2B5EF4-FFF2-40B4-BE49-F238E27FC236}">
-                <a16:creationId xmlns="" xmlns:a16="http://schemas.microsoft.com/office/drawing/2014/main" id="{D7125560-B1D6-4FEA-8C81-81F49D4763C4}"/>
+                <a16:creationId xmlns:a16="http://schemas.microsoft.com/office/drawing/2014/main" xmlns="" id="{D7125560-B1D6-4FEA-8C81-81F49D4763C4}"/>
               </a:ext>
             </a:extLst>
           </p:cNvPr>
@@ -11965,7 +11965,7 @@
           <p:cNvPr id="2" name="标题 1">
             <a:extLst>
               <a:ext uri="{FF2B5EF4-FFF2-40B4-BE49-F238E27FC236}">
-                <a16:creationId xmlns="" xmlns:a16="http://schemas.microsoft.com/office/drawing/2014/main" id="{235DD831-5C92-41D8-B2A4-F735B961D24C}"/>
+                <a16:creationId xmlns:a16="http://schemas.microsoft.com/office/drawing/2014/main" xmlns="" id="{235DD831-5C92-41D8-B2A4-F735B961D24C}"/>
               </a:ext>
             </a:extLst>
           </p:cNvPr>
@@ -11993,7 +11993,7 @@
           <p:cNvPr id="3" name="内容占位符 2">
             <a:extLst>
               <a:ext uri="{FF2B5EF4-FFF2-40B4-BE49-F238E27FC236}">
-                <a16:creationId xmlns="" xmlns:a16="http://schemas.microsoft.com/office/drawing/2014/main" id="{40589EF3-2B1D-4F74-90F9-1600D88D274F}"/>
+                <a16:creationId xmlns:a16="http://schemas.microsoft.com/office/drawing/2014/main" xmlns="" id="{40589EF3-2B1D-4F74-90F9-1600D88D274F}"/>
               </a:ext>
             </a:extLst>
           </p:cNvPr>
@@ -12055,7 +12055,7 @@
           <p:cNvPr id="4" name="内容占位符 3">
             <a:extLst>
               <a:ext uri="{FF2B5EF4-FFF2-40B4-BE49-F238E27FC236}">
-                <a16:creationId xmlns="" xmlns:a16="http://schemas.microsoft.com/office/drawing/2014/main" id="{31894757-41E5-4DC3-B486-BF0D8D2E3B3C}"/>
+                <a16:creationId xmlns:a16="http://schemas.microsoft.com/office/drawing/2014/main" xmlns="" id="{31894757-41E5-4DC3-B486-BF0D8D2E3B3C}"/>
               </a:ext>
             </a:extLst>
           </p:cNvPr>
@@ -12117,7 +12117,7 @@
           <p:cNvPr id="5" name="Rectangle 4">
             <a:extLst>
               <a:ext uri="{FF2B5EF4-FFF2-40B4-BE49-F238E27FC236}">
-                <a16:creationId xmlns="" xmlns:a16="http://schemas.microsoft.com/office/drawing/2014/main" id="{80B46424-4DF5-42C6-BA6D-7A5F0843E639}"/>
+                <a16:creationId xmlns:a16="http://schemas.microsoft.com/office/drawing/2014/main" xmlns="" id="{80B46424-4DF5-42C6-BA6D-7A5F0843E639}"/>
               </a:ext>
             </a:extLst>
           </p:cNvPr>
@@ -12151,7 +12151,7 @@
           <p:cNvPr id="6" name="Rectangle 5">
             <a:extLst>
               <a:ext uri="{FF2B5EF4-FFF2-40B4-BE49-F238E27FC236}">
-                <a16:creationId xmlns="" xmlns:a16="http://schemas.microsoft.com/office/drawing/2014/main" id="{54C6D9C2-78B1-4830-B70B-68D245CB3988}"/>
+                <a16:creationId xmlns:a16="http://schemas.microsoft.com/office/drawing/2014/main" xmlns="" id="{54C6D9C2-78B1-4830-B70B-68D245CB3988}"/>
               </a:ext>
             </a:extLst>
           </p:cNvPr>
@@ -12185,7 +12185,7 @@
           <p:cNvPr id="7" name="Rectangle 6">
             <a:extLst>
               <a:ext uri="{FF2B5EF4-FFF2-40B4-BE49-F238E27FC236}">
-                <a16:creationId xmlns="" xmlns:a16="http://schemas.microsoft.com/office/drawing/2014/main" id="{7C8F0C60-8AC6-4F0E-B049-CFBBD780349C}"/>
+                <a16:creationId xmlns:a16="http://schemas.microsoft.com/office/drawing/2014/main" xmlns="" id="{7C8F0C60-8AC6-4F0E-B049-CFBBD780349C}"/>
               </a:ext>
             </a:extLst>
           </p:cNvPr>
@@ -12256,7 +12256,7 @@
           <p:cNvPr id="2" name="标题 1">
             <a:extLst>
               <a:ext uri="{FF2B5EF4-FFF2-40B4-BE49-F238E27FC236}">
-                <a16:creationId xmlns="" xmlns:a16="http://schemas.microsoft.com/office/drawing/2014/main" id="{5EAC2349-C79E-4DAD-A7EC-F121B92EABC6}"/>
+                <a16:creationId xmlns:a16="http://schemas.microsoft.com/office/drawing/2014/main" xmlns="" id="{5EAC2349-C79E-4DAD-A7EC-F121B92EABC6}"/>
               </a:ext>
             </a:extLst>
           </p:cNvPr>
@@ -12289,7 +12289,7 @@
           <p:cNvPr id="3" name="文本占位符 2">
             <a:extLst>
               <a:ext uri="{FF2B5EF4-FFF2-40B4-BE49-F238E27FC236}">
-                <a16:creationId xmlns="" xmlns:a16="http://schemas.microsoft.com/office/drawing/2014/main" id="{6577C8D4-D6FA-4BC8-982E-A569EF349637}"/>
+                <a16:creationId xmlns:a16="http://schemas.microsoft.com/office/drawing/2014/main" xmlns="" id="{6577C8D4-D6FA-4BC8-982E-A569EF349637}"/>
               </a:ext>
             </a:extLst>
           </p:cNvPr>
@@ -12360,7 +12360,7 @@
           <p:cNvPr id="4" name="内容占位符 3">
             <a:extLst>
               <a:ext uri="{FF2B5EF4-FFF2-40B4-BE49-F238E27FC236}">
-                <a16:creationId xmlns="" xmlns:a16="http://schemas.microsoft.com/office/drawing/2014/main" id="{2C1BD52F-78B6-4701-9C21-05A4842E2948}"/>
+                <a16:creationId xmlns:a16="http://schemas.microsoft.com/office/drawing/2014/main" xmlns="" id="{2C1BD52F-78B6-4701-9C21-05A4842E2948}"/>
               </a:ext>
             </a:extLst>
           </p:cNvPr>
@@ -12422,7 +12422,7 @@
           <p:cNvPr id="5" name="文本占位符 4">
             <a:extLst>
               <a:ext uri="{FF2B5EF4-FFF2-40B4-BE49-F238E27FC236}">
-                <a16:creationId xmlns="" xmlns:a16="http://schemas.microsoft.com/office/drawing/2014/main" id="{41B5E117-E18D-486E-BBF0-E55E36688CE9}"/>
+                <a16:creationId xmlns:a16="http://schemas.microsoft.com/office/drawing/2014/main" xmlns="" id="{41B5E117-E18D-486E-BBF0-E55E36688CE9}"/>
               </a:ext>
             </a:extLst>
           </p:cNvPr>
@@ -12493,7 +12493,7 @@
           <p:cNvPr id="6" name="内容占位符 5">
             <a:extLst>
               <a:ext uri="{FF2B5EF4-FFF2-40B4-BE49-F238E27FC236}">
-                <a16:creationId xmlns="" xmlns:a16="http://schemas.microsoft.com/office/drawing/2014/main" id="{1A6184B9-916F-4A62-BB58-A9E1721165AE}"/>
+                <a16:creationId xmlns:a16="http://schemas.microsoft.com/office/drawing/2014/main" xmlns="" id="{1A6184B9-916F-4A62-BB58-A9E1721165AE}"/>
               </a:ext>
             </a:extLst>
           </p:cNvPr>
@@ -12555,7 +12555,7 @@
           <p:cNvPr id="7" name="Rectangle 4">
             <a:extLst>
               <a:ext uri="{FF2B5EF4-FFF2-40B4-BE49-F238E27FC236}">
-                <a16:creationId xmlns="" xmlns:a16="http://schemas.microsoft.com/office/drawing/2014/main" id="{9BDEFA24-1BB9-4A63-BE04-B2CD6F8BC7CD}"/>
+                <a16:creationId xmlns:a16="http://schemas.microsoft.com/office/drawing/2014/main" xmlns="" id="{9BDEFA24-1BB9-4A63-BE04-B2CD6F8BC7CD}"/>
               </a:ext>
             </a:extLst>
           </p:cNvPr>
@@ -12589,7 +12589,7 @@
           <p:cNvPr id="8" name="Rectangle 5">
             <a:extLst>
               <a:ext uri="{FF2B5EF4-FFF2-40B4-BE49-F238E27FC236}">
-                <a16:creationId xmlns="" xmlns:a16="http://schemas.microsoft.com/office/drawing/2014/main" id="{291227B2-68B3-4699-A416-5C0E6B364CA1}"/>
+                <a16:creationId xmlns:a16="http://schemas.microsoft.com/office/drawing/2014/main" xmlns="" id="{291227B2-68B3-4699-A416-5C0E6B364CA1}"/>
               </a:ext>
             </a:extLst>
           </p:cNvPr>
@@ -12623,7 +12623,7 @@
           <p:cNvPr id="9" name="Rectangle 6">
             <a:extLst>
               <a:ext uri="{FF2B5EF4-FFF2-40B4-BE49-F238E27FC236}">
-                <a16:creationId xmlns="" xmlns:a16="http://schemas.microsoft.com/office/drawing/2014/main" id="{DEC7A77C-9158-4F27-8F28-4C65512DA59A}"/>
+                <a16:creationId xmlns:a16="http://schemas.microsoft.com/office/drawing/2014/main" xmlns="" id="{DEC7A77C-9158-4F27-8F28-4C65512DA59A}"/>
               </a:ext>
             </a:extLst>
           </p:cNvPr>
@@ -12694,7 +12694,7 @@
           <p:cNvPr id="2" name="标题 1">
             <a:extLst>
               <a:ext uri="{FF2B5EF4-FFF2-40B4-BE49-F238E27FC236}">
-                <a16:creationId xmlns="" xmlns:a16="http://schemas.microsoft.com/office/drawing/2014/main" id="{2BC76C51-0028-4F2D-A216-4D11F5334867}"/>
+                <a16:creationId xmlns:a16="http://schemas.microsoft.com/office/drawing/2014/main" xmlns="" id="{2BC76C51-0028-4F2D-A216-4D11F5334867}"/>
               </a:ext>
             </a:extLst>
           </p:cNvPr>
@@ -12722,7 +12722,7 @@
           <p:cNvPr id="3" name="Rectangle 4">
             <a:extLst>
               <a:ext uri="{FF2B5EF4-FFF2-40B4-BE49-F238E27FC236}">
-                <a16:creationId xmlns="" xmlns:a16="http://schemas.microsoft.com/office/drawing/2014/main" id="{91CC3BF1-A404-4E2C-8AA3-99428C6F6DD8}"/>
+                <a16:creationId xmlns:a16="http://schemas.microsoft.com/office/drawing/2014/main" xmlns="" id="{91CC3BF1-A404-4E2C-8AA3-99428C6F6DD8}"/>
               </a:ext>
             </a:extLst>
           </p:cNvPr>
@@ -12756,7 +12756,7 @@
           <p:cNvPr id="4" name="Rectangle 5">
             <a:extLst>
               <a:ext uri="{FF2B5EF4-FFF2-40B4-BE49-F238E27FC236}">
-                <a16:creationId xmlns="" xmlns:a16="http://schemas.microsoft.com/office/drawing/2014/main" id="{B7D80654-FEB6-4772-9441-0475550AB2E7}"/>
+                <a16:creationId xmlns:a16="http://schemas.microsoft.com/office/drawing/2014/main" xmlns="" id="{B7D80654-FEB6-4772-9441-0475550AB2E7}"/>
               </a:ext>
             </a:extLst>
           </p:cNvPr>
@@ -12790,7 +12790,7 @@
           <p:cNvPr id="5" name="Rectangle 6">
             <a:extLst>
               <a:ext uri="{FF2B5EF4-FFF2-40B4-BE49-F238E27FC236}">
-                <a16:creationId xmlns="" xmlns:a16="http://schemas.microsoft.com/office/drawing/2014/main" id="{968FB6E6-FDEC-4041-BA77-FFA3A3FA254C}"/>
+                <a16:creationId xmlns:a16="http://schemas.microsoft.com/office/drawing/2014/main" xmlns="" id="{968FB6E6-FDEC-4041-BA77-FFA3A3FA254C}"/>
               </a:ext>
             </a:extLst>
           </p:cNvPr>
@@ -12861,7 +12861,7 @@
           <p:cNvPr id="2" name="Rectangle 4">
             <a:extLst>
               <a:ext uri="{FF2B5EF4-FFF2-40B4-BE49-F238E27FC236}">
-                <a16:creationId xmlns="" xmlns:a16="http://schemas.microsoft.com/office/drawing/2014/main" id="{6DC56CB5-95F7-41B4-8677-E12EBE1FBD59}"/>
+                <a16:creationId xmlns:a16="http://schemas.microsoft.com/office/drawing/2014/main" xmlns="" id="{6DC56CB5-95F7-41B4-8677-E12EBE1FBD59}"/>
               </a:ext>
             </a:extLst>
           </p:cNvPr>
@@ -12895,7 +12895,7 @@
           <p:cNvPr id="3" name="Rectangle 5">
             <a:extLst>
               <a:ext uri="{FF2B5EF4-FFF2-40B4-BE49-F238E27FC236}">
-                <a16:creationId xmlns="" xmlns:a16="http://schemas.microsoft.com/office/drawing/2014/main" id="{B7F0A7C5-5870-4D46-AA35-704A0D3C8668}"/>
+                <a16:creationId xmlns:a16="http://schemas.microsoft.com/office/drawing/2014/main" xmlns="" id="{B7F0A7C5-5870-4D46-AA35-704A0D3C8668}"/>
               </a:ext>
             </a:extLst>
           </p:cNvPr>
@@ -12929,7 +12929,7 @@
           <p:cNvPr id="4" name="Rectangle 6">
             <a:extLst>
               <a:ext uri="{FF2B5EF4-FFF2-40B4-BE49-F238E27FC236}">
-                <a16:creationId xmlns="" xmlns:a16="http://schemas.microsoft.com/office/drawing/2014/main" id="{11F62A78-2485-4514-AD6F-798D74A4E024}"/>
+                <a16:creationId xmlns:a16="http://schemas.microsoft.com/office/drawing/2014/main" xmlns="" id="{11F62A78-2485-4514-AD6F-798D74A4E024}"/>
               </a:ext>
             </a:extLst>
           </p:cNvPr>
@@ -13000,7 +13000,7 @@
           <p:cNvPr id="2" name="标题 1">
             <a:extLst>
               <a:ext uri="{FF2B5EF4-FFF2-40B4-BE49-F238E27FC236}">
-                <a16:creationId xmlns="" xmlns:a16="http://schemas.microsoft.com/office/drawing/2014/main" id="{0BD92CCA-0140-4241-AF84-A0DFC0FC9C4C}"/>
+                <a16:creationId xmlns:a16="http://schemas.microsoft.com/office/drawing/2014/main" xmlns="" id="{0BD92CCA-0140-4241-AF84-A0DFC0FC9C4C}"/>
               </a:ext>
             </a:extLst>
           </p:cNvPr>
@@ -13037,7 +13037,7 @@
           <p:cNvPr id="3" name="内容占位符 2">
             <a:extLst>
               <a:ext uri="{FF2B5EF4-FFF2-40B4-BE49-F238E27FC236}">
-                <a16:creationId xmlns="" xmlns:a16="http://schemas.microsoft.com/office/drawing/2014/main" id="{B149F413-03E0-42C8-96F2-A26C380EC64D}"/>
+                <a16:creationId xmlns:a16="http://schemas.microsoft.com/office/drawing/2014/main" xmlns="" id="{B149F413-03E0-42C8-96F2-A26C380EC64D}"/>
               </a:ext>
             </a:extLst>
           </p:cNvPr>
@@ -13127,7 +13127,7 @@
           <p:cNvPr id="4" name="文本占位符 3">
             <a:extLst>
               <a:ext uri="{FF2B5EF4-FFF2-40B4-BE49-F238E27FC236}">
-                <a16:creationId xmlns="" xmlns:a16="http://schemas.microsoft.com/office/drawing/2014/main" id="{80CED1CF-0137-4B94-B04B-8FDCB7C8B161}"/>
+                <a16:creationId xmlns:a16="http://schemas.microsoft.com/office/drawing/2014/main" xmlns="" id="{80CED1CF-0137-4B94-B04B-8FDCB7C8B161}"/>
               </a:ext>
             </a:extLst>
           </p:cNvPr>
@@ -13198,7 +13198,7 @@
           <p:cNvPr id="5" name="Rectangle 4">
             <a:extLst>
               <a:ext uri="{FF2B5EF4-FFF2-40B4-BE49-F238E27FC236}">
-                <a16:creationId xmlns="" xmlns:a16="http://schemas.microsoft.com/office/drawing/2014/main" id="{83A028F8-90C5-4894-9D68-1F454A6818EB}"/>
+                <a16:creationId xmlns:a16="http://schemas.microsoft.com/office/drawing/2014/main" xmlns="" id="{83A028F8-90C5-4894-9D68-1F454A6818EB}"/>
               </a:ext>
             </a:extLst>
           </p:cNvPr>
@@ -13232,7 +13232,7 @@
           <p:cNvPr id="6" name="Rectangle 5">
             <a:extLst>
               <a:ext uri="{FF2B5EF4-FFF2-40B4-BE49-F238E27FC236}">
-                <a16:creationId xmlns="" xmlns:a16="http://schemas.microsoft.com/office/drawing/2014/main" id="{4B6B0556-8025-49EB-A9D8-E82F10331C3C}"/>
+                <a16:creationId xmlns:a16="http://schemas.microsoft.com/office/drawing/2014/main" xmlns="" id="{4B6B0556-8025-49EB-A9D8-E82F10331C3C}"/>
               </a:ext>
             </a:extLst>
           </p:cNvPr>
@@ -13266,7 +13266,7 @@
           <p:cNvPr id="7" name="Rectangle 6">
             <a:extLst>
               <a:ext uri="{FF2B5EF4-FFF2-40B4-BE49-F238E27FC236}">
-                <a16:creationId xmlns="" xmlns:a16="http://schemas.microsoft.com/office/drawing/2014/main" id="{327CC8F1-4BD0-4FEC-AECB-DEAE8BCBA203}"/>
+                <a16:creationId xmlns:a16="http://schemas.microsoft.com/office/drawing/2014/main" xmlns="" id="{327CC8F1-4BD0-4FEC-AECB-DEAE8BCBA203}"/>
               </a:ext>
             </a:extLst>
           </p:cNvPr>
@@ -13337,7 +13337,7 @@
           <p:cNvPr id="2" name="标题 1">
             <a:extLst>
               <a:ext uri="{FF2B5EF4-FFF2-40B4-BE49-F238E27FC236}">
-                <a16:creationId xmlns="" xmlns:a16="http://schemas.microsoft.com/office/drawing/2014/main" id="{71EFFC16-3EB0-4FBB-96E7-A6D46DBE0860}"/>
+                <a16:creationId xmlns:a16="http://schemas.microsoft.com/office/drawing/2014/main" xmlns="" id="{71EFFC16-3EB0-4FBB-96E7-A6D46DBE0860}"/>
               </a:ext>
             </a:extLst>
           </p:cNvPr>
@@ -13374,7 +13374,7 @@
           <p:cNvPr id="3" name="图片占位符 2">
             <a:extLst>
               <a:ext uri="{FF2B5EF4-FFF2-40B4-BE49-F238E27FC236}">
-                <a16:creationId xmlns="" xmlns:a16="http://schemas.microsoft.com/office/drawing/2014/main" id="{5B422F93-2D7C-4C8D-98F2-E969A8987B29}"/>
+                <a16:creationId xmlns:a16="http://schemas.microsoft.com/office/drawing/2014/main" xmlns="" id="{5B422F93-2D7C-4C8D-98F2-E969A8987B29}"/>
               </a:ext>
             </a:extLst>
           </p:cNvPr>
@@ -13442,7 +13442,7 @@
           <p:cNvPr id="4" name="文本占位符 3">
             <a:extLst>
               <a:ext uri="{FF2B5EF4-FFF2-40B4-BE49-F238E27FC236}">
-                <a16:creationId xmlns="" xmlns:a16="http://schemas.microsoft.com/office/drawing/2014/main" id="{C6BF88C8-E1D1-4529-AA38-9722474E4E30}"/>
+                <a16:creationId xmlns:a16="http://schemas.microsoft.com/office/drawing/2014/main" xmlns="" id="{C6BF88C8-E1D1-4529-AA38-9722474E4E30}"/>
               </a:ext>
             </a:extLst>
           </p:cNvPr>
@@ -13513,7 +13513,7 @@
           <p:cNvPr id="5" name="Rectangle 4">
             <a:extLst>
               <a:ext uri="{FF2B5EF4-FFF2-40B4-BE49-F238E27FC236}">
-                <a16:creationId xmlns="" xmlns:a16="http://schemas.microsoft.com/office/drawing/2014/main" id="{8A92ADD1-D1E1-4FA7-89F9-EAC168EC5F5E}"/>
+                <a16:creationId xmlns:a16="http://schemas.microsoft.com/office/drawing/2014/main" xmlns="" id="{8A92ADD1-D1E1-4FA7-89F9-EAC168EC5F5E}"/>
               </a:ext>
             </a:extLst>
           </p:cNvPr>
@@ -13547,7 +13547,7 @@
           <p:cNvPr id="6" name="Rectangle 5">
             <a:extLst>
               <a:ext uri="{FF2B5EF4-FFF2-40B4-BE49-F238E27FC236}">
-                <a16:creationId xmlns="" xmlns:a16="http://schemas.microsoft.com/office/drawing/2014/main" id="{8AC2AA6A-2DDF-4129-A813-17A48D5D6578}"/>
+                <a16:creationId xmlns:a16="http://schemas.microsoft.com/office/drawing/2014/main" xmlns="" id="{8AC2AA6A-2DDF-4129-A813-17A48D5D6578}"/>
               </a:ext>
             </a:extLst>
           </p:cNvPr>
@@ -13581,7 +13581,7 @@
           <p:cNvPr id="7" name="Rectangle 6">
             <a:extLst>
               <a:ext uri="{FF2B5EF4-FFF2-40B4-BE49-F238E27FC236}">
-                <a16:creationId xmlns="" xmlns:a16="http://schemas.microsoft.com/office/drawing/2014/main" id="{AFAB14F8-8064-48F6-8B6D-749183531730}"/>
+                <a16:creationId xmlns:a16="http://schemas.microsoft.com/office/drawing/2014/main" xmlns="" id="{AFAB14F8-8064-48F6-8B6D-749183531730}"/>
               </a:ext>
             </a:extLst>
           </p:cNvPr>
@@ -13664,7 +13664,7 @@
           <p:cNvPr id="1026" name="Rectangle 2">
             <a:extLst>
               <a:ext uri="{FF2B5EF4-FFF2-40B4-BE49-F238E27FC236}">
-                <a16:creationId xmlns="" xmlns:a16="http://schemas.microsoft.com/office/drawing/2014/main" id="{80EF2504-E3EA-4812-BCE9-548B5A526130}"/>
+                <a16:creationId xmlns:a16="http://schemas.microsoft.com/office/drawing/2014/main" xmlns="" id="{80EF2504-E3EA-4812-BCE9-548B5A526130}"/>
               </a:ext>
             </a:extLst>
           </p:cNvPr>
@@ -13738,7 +13738,7 @@
           <p:cNvPr id="1027" name="Rectangle 3">
             <a:extLst>
               <a:ext uri="{FF2B5EF4-FFF2-40B4-BE49-F238E27FC236}">
-                <a16:creationId xmlns="" xmlns:a16="http://schemas.microsoft.com/office/drawing/2014/main" id="{7E888592-4D67-4FDC-8ACC-8DD192CAF425}"/>
+                <a16:creationId xmlns:a16="http://schemas.microsoft.com/office/drawing/2014/main" xmlns="" id="{7E888592-4D67-4FDC-8ACC-8DD192CAF425}"/>
               </a:ext>
             </a:extLst>
           </p:cNvPr>
@@ -13840,7 +13840,7 @@
           <p:cNvPr id="1028" name="Rectangle 4">
             <a:extLst>
               <a:ext uri="{FF2B5EF4-FFF2-40B4-BE49-F238E27FC236}">
-                <a16:creationId xmlns="" xmlns:a16="http://schemas.microsoft.com/office/drawing/2014/main" id="{40A3712E-94B2-46ED-881D-E1249EF279C0}"/>
+                <a16:creationId xmlns:a16="http://schemas.microsoft.com/office/drawing/2014/main" xmlns="" id="{40A3712E-94B2-46ED-881D-E1249EF279C0}"/>
               </a:ext>
             </a:extLst>
           </p:cNvPr>
@@ -13917,7 +13917,7 @@
           <p:cNvPr id="1029" name="Rectangle 5">
             <a:extLst>
               <a:ext uri="{FF2B5EF4-FFF2-40B4-BE49-F238E27FC236}">
-                <a16:creationId xmlns="" xmlns:a16="http://schemas.microsoft.com/office/drawing/2014/main" id="{26116D60-C064-41BB-B932-09348EA6EB7D}"/>
+                <a16:creationId xmlns:a16="http://schemas.microsoft.com/office/drawing/2014/main" xmlns="" id="{26116D60-C064-41BB-B932-09348EA6EB7D}"/>
               </a:ext>
             </a:extLst>
           </p:cNvPr>
@@ -13994,7 +13994,7 @@
           <p:cNvPr id="1030" name="Rectangle 6">
             <a:extLst>
               <a:ext uri="{FF2B5EF4-FFF2-40B4-BE49-F238E27FC236}">
-                <a16:creationId xmlns="" xmlns:a16="http://schemas.microsoft.com/office/drawing/2014/main" id="{4E6E49BE-DB26-4C77-94F7-5228E224DF48}"/>
+                <a16:creationId xmlns:a16="http://schemas.microsoft.com/office/drawing/2014/main" xmlns="" id="{4E6E49BE-DB26-4C77-94F7-5228E224DF48}"/>
               </a:ext>
             </a:extLst>
           </p:cNvPr>
@@ -14584,7 +14584,7 @@
           <p:cNvPr id="5122" name="标题 1">
             <a:extLst>
               <a:ext uri="{FF2B5EF4-FFF2-40B4-BE49-F238E27FC236}">
-                <a16:creationId xmlns="" xmlns:a16="http://schemas.microsoft.com/office/drawing/2014/main" id="{A237414D-C4E1-407F-9B0D-585D2D878A74}"/>
+                <a16:creationId xmlns:a16="http://schemas.microsoft.com/office/drawing/2014/main" xmlns="" id="{A237414D-C4E1-407F-9B0D-585D2D878A74}"/>
               </a:ext>
             </a:extLst>
           </p:cNvPr>
@@ -14665,7 +14665,7 @@
           <p:cNvPr id="3" name="内容占位符 2">
             <a:extLst>
               <a:ext uri="{FF2B5EF4-FFF2-40B4-BE49-F238E27FC236}">
-                <a16:creationId xmlns="" xmlns:a16="http://schemas.microsoft.com/office/drawing/2014/main" id="{3DFD56C3-3B63-4F4C-A455-80D220434928}"/>
+                <a16:creationId xmlns:a16="http://schemas.microsoft.com/office/drawing/2014/main" xmlns="" id="{3DFD56C3-3B63-4F4C-A455-80D220434928}"/>
               </a:ext>
             </a:extLst>
           </p:cNvPr>
@@ -14816,7 +14816,7 @@
           <p:cNvPr id="4" name="内容占位符 2">
             <a:extLst>
               <a:ext uri="{FF2B5EF4-FFF2-40B4-BE49-F238E27FC236}">
-                <a16:creationId xmlns="" xmlns:a16="http://schemas.microsoft.com/office/drawing/2014/main" id="{3DFD56C3-3B63-4F4C-A455-80D220434928}"/>
+                <a16:creationId xmlns:a16="http://schemas.microsoft.com/office/drawing/2014/main" xmlns="" id="{3DFD56C3-3B63-4F4C-A455-80D220434928}"/>
               </a:ext>
             </a:extLst>
           </p:cNvPr>
@@ -14827,8 +14827,8 @@
         </p:nvSpPr>
         <p:spPr bwMode="auto">
           <a:xfrm>
-            <a:off x="7583000" y="5410200"/>
-            <a:ext cx="4014217" cy="926973"/>
+            <a:off x="7583000" y="5256212"/>
+            <a:ext cx="4014217" cy="1227138"/>
           </a:xfrm>
           <a:prstGeom prst="rect">
             <a:avLst/>
@@ -15055,13 +15055,73 @@
               <a:t>by: </a:t>
             </a:r>
             <a:r>
+              <a:rPr lang="en-US" altLang="zh-CN" sz="2400" dirty="0" err="1" smtClean="0">
+                <a:latin typeface="Times New Roman" panose="02020603050405020304" pitchFamily="18" charset="0"/>
+                <a:ea typeface="Arial Unicode MS" panose="020B0604020202020204" pitchFamily="34" charset="-122"/>
+                <a:cs typeface="Times New Roman" panose="02020603050405020304" pitchFamily="18" charset="0"/>
+              </a:rPr>
+              <a:t>Junpeng</a:t>
+            </a:r>
+            <a:r>
               <a:rPr lang="en-US" altLang="zh-CN" sz="2400" dirty="0" smtClean="0">
                 <a:latin typeface="Times New Roman" panose="02020603050405020304" pitchFamily="18" charset="0"/>
                 <a:ea typeface="Arial Unicode MS" panose="020B0604020202020204" pitchFamily="34" charset="-122"/>
                 <a:cs typeface="Times New Roman" panose="02020603050405020304" pitchFamily="18" charset="0"/>
               </a:rPr>
-              <a:t>Junpeng Zhu</a:t>
-            </a:r>
+              <a:t> </a:t>
+            </a:r>
+            <a:r>
+              <a:rPr lang="en-US" altLang="zh-CN" sz="2400" dirty="0" smtClean="0">
+                <a:latin typeface="Times New Roman" panose="02020603050405020304" pitchFamily="18" charset="0"/>
+                <a:ea typeface="Arial Unicode MS" panose="020B0604020202020204" pitchFamily="34" charset="-122"/>
+                <a:cs typeface="Times New Roman" panose="02020603050405020304" pitchFamily="18" charset="0"/>
+              </a:rPr>
+              <a:t>Zhu</a:t>
+            </a:r>
+          </a:p>
+          <a:p>
+            <a:pPr>
+              <a:spcBef>
+                <a:spcPct val="0"/>
+              </a:spcBef>
+            </a:pPr>
+            <a:r>
+              <a:rPr lang="en-US" altLang="zh-CN" sz="2400" b="1" dirty="0" smtClean="0">
+                <a:latin typeface="Times New Roman" panose="02020603050405020304" pitchFamily="18" charset="0"/>
+                <a:ea typeface="Arial Unicode MS" panose="020B0604020202020204" pitchFamily="34" charset="-122"/>
+                <a:cs typeface="Times New Roman" panose="02020603050405020304" pitchFamily="18" charset="0"/>
+              </a:rPr>
+              <a:t>Advisor:</a:t>
+            </a:r>
+            <a:r>
+              <a:rPr lang="en-US" altLang="zh-CN" sz="2400" dirty="0" smtClean="0">
+                <a:latin typeface="Times New Roman" panose="02020603050405020304" pitchFamily="18" charset="0"/>
+                <a:ea typeface="Arial Unicode MS" panose="020B0604020202020204" pitchFamily="34" charset="-122"/>
+                <a:cs typeface="Times New Roman" panose="02020603050405020304" pitchFamily="18" charset="0"/>
+              </a:rPr>
+              <a:t> Ji-</a:t>
+            </a:r>
+            <a:r>
+              <a:rPr lang="en-US" altLang="zh-CN" sz="2400" dirty="0" err="1" smtClean="0">
+                <a:latin typeface="Times New Roman" panose="02020603050405020304" pitchFamily="18" charset="0"/>
+                <a:ea typeface="Arial Unicode MS" panose="020B0604020202020204" pitchFamily="34" charset="-122"/>
+                <a:cs typeface="Times New Roman" panose="02020603050405020304" pitchFamily="18" charset="0"/>
+              </a:rPr>
+              <a:t>feng</a:t>
+            </a:r>
+            <a:r>
+              <a:rPr lang="en-US" altLang="zh-CN" sz="2400" dirty="0" smtClean="0">
+                <a:latin typeface="Times New Roman" panose="02020603050405020304" pitchFamily="18" charset="0"/>
+                <a:ea typeface="Arial Unicode MS" panose="020B0604020202020204" pitchFamily="34" charset="-122"/>
+                <a:cs typeface="Times New Roman" panose="02020603050405020304" pitchFamily="18" charset="0"/>
+              </a:rPr>
+              <a:t> He</a:t>
+            </a:r>
+            <a:endParaRPr lang="en-US" altLang="zh-CN" sz="2400" dirty="0" smtClean="0">
+              <a:latin typeface="Times New Roman" panose="02020603050405020304" pitchFamily="18" charset="0"/>
+              <a:ea typeface="Arial Unicode MS" panose="020B0604020202020204" pitchFamily="34" charset="-122"/>
+              <a:cs typeface="Times New Roman" panose="02020603050405020304" pitchFamily="18" charset="0"/>
+            </a:endParaRPr>
           </a:p>
           <a:p>
             <a:pPr>
@@ -15075,7 +15135,15 @@
                 <a:ea typeface="楷体" pitchFamily="49" charset="-122"/>
                 <a:cs typeface="Times New Roman" pitchFamily="18" charset="0"/>
               </a:rPr>
-              <a:t>Mar 13, 2019</a:t>
+              <a:t>May </a:t>
+            </a:r>
+            <a:r>
+              <a:rPr lang="en-US" altLang="zh-CN" sz="2400" dirty="0" smtClean="0">
+                <a:latin typeface="Times New Roman" pitchFamily="18" charset="0"/>
+                <a:ea typeface="楷体" pitchFamily="49" charset="-122"/>
+                <a:cs typeface="Times New Roman" pitchFamily="18" charset="0"/>
+              </a:rPr>
+              <a:t>13, 2019</a:t>
             </a:r>
             <a:endParaRPr lang="en-US" altLang="zh-CN" sz="2400" dirty="0">
               <a:latin typeface="Times New Roman" pitchFamily="18" charset="0"/>
@@ -15151,7 +15219,7 @@
           <p:cNvPr id="5122" name="标题 1">
             <a:extLst>
               <a:ext uri="{FF2B5EF4-FFF2-40B4-BE49-F238E27FC236}">
-                <a16:creationId xmlns="" xmlns:a16="http://schemas.microsoft.com/office/drawing/2014/main" id="{A237414D-C4E1-407F-9B0D-585D2D878A74}"/>
+                <a16:creationId xmlns:a16="http://schemas.microsoft.com/office/drawing/2014/main" xmlns="" id="{A237414D-C4E1-407F-9B0D-585D2D878A74}"/>
               </a:ext>
             </a:extLst>
           </p:cNvPr>
@@ -15191,7 +15259,7 @@
           <p:cNvPr id="3" name="内容占位符 2">
             <a:extLst>
               <a:ext uri="{FF2B5EF4-FFF2-40B4-BE49-F238E27FC236}">
-                <a16:creationId xmlns="" xmlns:a16="http://schemas.microsoft.com/office/drawing/2014/main" id="{3DFD56C3-3B63-4F4C-A455-80D220434928}"/>
+                <a16:creationId xmlns:a16="http://schemas.microsoft.com/office/drawing/2014/main" xmlns="" id="{3DFD56C3-3B63-4F4C-A455-80D220434928}"/>
               </a:ext>
             </a:extLst>
           </p:cNvPr>
@@ -15567,7 +15635,7 @@
           <p:cNvPr id="5122" name="标题 1">
             <a:extLst>
               <a:ext uri="{FF2B5EF4-FFF2-40B4-BE49-F238E27FC236}">
-                <a16:creationId xmlns="" xmlns:a16="http://schemas.microsoft.com/office/drawing/2014/main" id="{A237414D-C4E1-407F-9B0D-585D2D878A74}"/>
+                <a16:creationId xmlns:a16="http://schemas.microsoft.com/office/drawing/2014/main" xmlns="" id="{A237414D-C4E1-407F-9B0D-585D2D878A74}"/>
               </a:ext>
             </a:extLst>
           </p:cNvPr>
@@ -15607,7 +15675,7 @@
           <p:cNvPr id="3" name="内容占位符 2">
             <a:extLst>
               <a:ext uri="{FF2B5EF4-FFF2-40B4-BE49-F238E27FC236}">
-                <a16:creationId xmlns="" xmlns:a16="http://schemas.microsoft.com/office/drawing/2014/main" id="{3DFD56C3-3B63-4F4C-A455-80D220434928}"/>
+                <a16:creationId xmlns:a16="http://schemas.microsoft.com/office/drawing/2014/main" xmlns="" id="{3DFD56C3-3B63-4F4C-A455-80D220434928}"/>
               </a:ext>
             </a:extLst>
           </p:cNvPr>
@@ -15930,7 +15998,7 @@
           <p:cNvPr id="5122" name="标题 1">
             <a:extLst>
               <a:ext uri="{FF2B5EF4-FFF2-40B4-BE49-F238E27FC236}">
-                <a16:creationId xmlns="" xmlns:a16="http://schemas.microsoft.com/office/drawing/2014/main" id="{A237414D-C4E1-407F-9B0D-585D2D878A74}"/>
+                <a16:creationId xmlns:a16="http://schemas.microsoft.com/office/drawing/2014/main" xmlns="" id="{A237414D-C4E1-407F-9B0D-585D2D878A74}"/>
               </a:ext>
             </a:extLst>
           </p:cNvPr>
@@ -15970,7 +16038,7 @@
           <p:cNvPr id="3" name="内容占位符 2">
             <a:extLst>
               <a:ext uri="{FF2B5EF4-FFF2-40B4-BE49-F238E27FC236}">
-                <a16:creationId xmlns="" xmlns:a16="http://schemas.microsoft.com/office/drawing/2014/main" id="{3DFD56C3-3B63-4F4C-A455-80D220434928}"/>
+                <a16:creationId xmlns:a16="http://schemas.microsoft.com/office/drawing/2014/main" xmlns="" id="{3DFD56C3-3B63-4F4C-A455-80D220434928}"/>
               </a:ext>
             </a:extLst>
           </p:cNvPr>
@@ -16267,7 +16335,7 @@
           <p:cNvPr id="5122" name="标题 1">
             <a:extLst>
               <a:ext uri="{FF2B5EF4-FFF2-40B4-BE49-F238E27FC236}">
-                <a16:creationId xmlns="" xmlns:a16="http://schemas.microsoft.com/office/drawing/2014/main" id="{A237414D-C4E1-407F-9B0D-585D2D878A74}"/>
+                <a16:creationId xmlns:a16="http://schemas.microsoft.com/office/drawing/2014/main" xmlns="" id="{A237414D-C4E1-407F-9B0D-585D2D878A74}"/>
               </a:ext>
             </a:extLst>
           </p:cNvPr>
@@ -16307,7 +16375,7 @@
           <p:cNvPr id="3" name="内容占位符 2">
             <a:extLst>
               <a:ext uri="{FF2B5EF4-FFF2-40B4-BE49-F238E27FC236}">
-                <a16:creationId xmlns="" xmlns:a16="http://schemas.microsoft.com/office/drawing/2014/main" id="{3DFD56C3-3B63-4F4C-A455-80D220434928}"/>
+                <a16:creationId xmlns:a16="http://schemas.microsoft.com/office/drawing/2014/main" xmlns="" id="{3DFD56C3-3B63-4F4C-A455-80D220434928}"/>
               </a:ext>
             </a:extLst>
           </p:cNvPr>
@@ -16558,7 +16626,7 @@
           <p:cNvPr id="5122" name="标题 1">
             <a:extLst>
               <a:ext uri="{FF2B5EF4-FFF2-40B4-BE49-F238E27FC236}">
-                <a16:creationId xmlns="" xmlns:a16="http://schemas.microsoft.com/office/drawing/2014/main" id="{A237414D-C4E1-407F-9B0D-585D2D878A74}"/>
+                <a16:creationId xmlns:a16="http://schemas.microsoft.com/office/drawing/2014/main" xmlns="" id="{A237414D-C4E1-407F-9B0D-585D2D878A74}"/>
               </a:ext>
             </a:extLst>
           </p:cNvPr>
@@ -16598,7 +16666,7 @@
           <p:cNvPr id="3" name="内容占位符 2">
             <a:extLst>
               <a:ext uri="{FF2B5EF4-FFF2-40B4-BE49-F238E27FC236}">
-                <a16:creationId xmlns="" xmlns:a16="http://schemas.microsoft.com/office/drawing/2014/main" id="{3DFD56C3-3B63-4F4C-A455-80D220434928}"/>
+                <a16:creationId xmlns:a16="http://schemas.microsoft.com/office/drawing/2014/main" xmlns="" id="{3DFD56C3-3B63-4F4C-A455-80D220434928}"/>
               </a:ext>
             </a:extLst>
           </p:cNvPr>
@@ -16974,7 +17042,7 @@
           <p:cNvPr id="5122" name="标题 1">
             <a:extLst>
               <a:ext uri="{FF2B5EF4-FFF2-40B4-BE49-F238E27FC236}">
-                <a16:creationId xmlns="" xmlns:a16="http://schemas.microsoft.com/office/drawing/2014/main" id="{A237414D-C4E1-407F-9B0D-585D2D878A74}"/>
+                <a16:creationId xmlns:a16="http://schemas.microsoft.com/office/drawing/2014/main" xmlns="" id="{A237414D-C4E1-407F-9B0D-585D2D878A74}"/>
               </a:ext>
             </a:extLst>
           </p:cNvPr>
@@ -17010,7 +17078,7 @@
           <p:cNvPr id="3" name="内容占位符 2">
             <a:extLst>
               <a:ext uri="{FF2B5EF4-FFF2-40B4-BE49-F238E27FC236}">
-                <a16:creationId xmlns="" xmlns:a16="http://schemas.microsoft.com/office/drawing/2014/main" id="{3DFD56C3-3B63-4F4C-A455-80D220434928}"/>
+                <a16:creationId xmlns:a16="http://schemas.microsoft.com/office/drawing/2014/main" xmlns="" id="{3DFD56C3-3B63-4F4C-A455-80D220434928}"/>
               </a:ext>
             </a:extLst>
           </p:cNvPr>
@@ -17303,7 +17371,7 @@
           <p:cNvPr id="5122" name="标题 1">
             <a:extLst>
               <a:ext uri="{FF2B5EF4-FFF2-40B4-BE49-F238E27FC236}">
-                <a16:creationId xmlns="" xmlns:a16="http://schemas.microsoft.com/office/drawing/2014/main" id="{A237414D-C4E1-407F-9B0D-585D2D878A74}"/>
+                <a16:creationId xmlns:a16="http://schemas.microsoft.com/office/drawing/2014/main" xmlns="" id="{A237414D-C4E1-407F-9B0D-585D2D878A74}"/>
               </a:ext>
             </a:extLst>
           </p:cNvPr>
@@ -17339,7 +17407,7 @@
           <p:cNvPr id="3" name="内容占位符 2">
             <a:extLst>
               <a:ext uri="{FF2B5EF4-FFF2-40B4-BE49-F238E27FC236}">
-                <a16:creationId xmlns="" xmlns:a16="http://schemas.microsoft.com/office/drawing/2014/main" id="{3DFD56C3-3B63-4F4C-A455-80D220434928}"/>
+                <a16:creationId xmlns:a16="http://schemas.microsoft.com/office/drawing/2014/main" xmlns="" id="{3DFD56C3-3B63-4F4C-A455-80D220434928}"/>
               </a:ext>
             </a:extLst>
           </p:cNvPr>
@@ -18255,7 +18323,7 @@
           <p:cNvPr id="5122" name="标题 1">
             <a:extLst>
               <a:ext uri="{FF2B5EF4-FFF2-40B4-BE49-F238E27FC236}">
-                <a16:creationId xmlns="" xmlns:a16="http://schemas.microsoft.com/office/drawing/2014/main" id="{A237414D-C4E1-407F-9B0D-585D2D878A74}"/>
+                <a16:creationId xmlns:a16="http://schemas.microsoft.com/office/drawing/2014/main" xmlns="" id="{A237414D-C4E1-407F-9B0D-585D2D878A74}"/>
               </a:ext>
             </a:extLst>
           </p:cNvPr>
@@ -18602,13 +18670,6 @@
                 <a:cs typeface="Times New Roman" panose="02020603050405020304" pitchFamily="18" charset="0"/>
               </a:rPr>
               <a:t>, and responding to requests.</a:t>
-            </a:r>
-            <a:r>
-              <a:rPr lang="en-US" altLang="zh-CN" dirty="0">
-                <a:latin typeface="Times New Roman" panose="02020603050405020304" pitchFamily="18" charset="0"/>
-                <a:cs typeface="Times New Roman" panose="02020603050405020304" pitchFamily="18" charset="0"/>
-              </a:rPr>
-              <a:t/>
             </a:r>
             <a:br>
               <a:rPr lang="en-US" altLang="zh-CN" dirty="0">
@@ -18672,7 +18733,7 @@
           <p:cNvPr id="5122" name="标题 1">
             <a:extLst>
               <a:ext uri="{FF2B5EF4-FFF2-40B4-BE49-F238E27FC236}">
-                <a16:creationId xmlns="" xmlns:a16="http://schemas.microsoft.com/office/drawing/2014/main" id="{A237414D-C4E1-407F-9B0D-585D2D878A74}"/>
+                <a16:creationId xmlns:a16="http://schemas.microsoft.com/office/drawing/2014/main" xmlns="" id="{A237414D-C4E1-407F-9B0D-585D2D878A74}"/>
               </a:ext>
             </a:extLst>
           </p:cNvPr>
@@ -18712,7 +18773,7 @@
           <p:cNvPr id="3" name="内容占位符 2">
             <a:extLst>
               <a:ext uri="{FF2B5EF4-FFF2-40B4-BE49-F238E27FC236}">
-                <a16:creationId xmlns="" xmlns:a16="http://schemas.microsoft.com/office/drawing/2014/main" id="{3DFD56C3-3B63-4F4C-A455-80D220434928}"/>
+                <a16:creationId xmlns:a16="http://schemas.microsoft.com/office/drawing/2014/main" xmlns="" id="{3DFD56C3-3B63-4F4C-A455-80D220434928}"/>
               </a:ext>
             </a:extLst>
           </p:cNvPr>
@@ -19081,7 +19142,7 @@
           <p:cNvPr id="5122" name="标题 1">
             <a:extLst>
               <a:ext uri="{FF2B5EF4-FFF2-40B4-BE49-F238E27FC236}">
-                <a16:creationId xmlns="" xmlns:a16="http://schemas.microsoft.com/office/drawing/2014/main" id="{A237414D-C4E1-407F-9B0D-585D2D878A74}"/>
+                <a16:creationId xmlns:a16="http://schemas.microsoft.com/office/drawing/2014/main" xmlns="" id="{A237414D-C4E1-407F-9B0D-585D2D878A74}"/>
               </a:ext>
             </a:extLst>
           </p:cNvPr>
@@ -20263,7 +20324,7 @@
           <p:cNvPr id="5122" name="标题 1">
             <a:extLst>
               <a:ext uri="{FF2B5EF4-FFF2-40B4-BE49-F238E27FC236}">
-                <a16:creationId xmlns="" xmlns:a16="http://schemas.microsoft.com/office/drawing/2014/main" id="{A237414D-C4E1-407F-9B0D-585D2D878A74}"/>
+                <a16:creationId xmlns:a16="http://schemas.microsoft.com/office/drawing/2014/main" xmlns="" id="{A237414D-C4E1-407F-9B0D-585D2D878A74}"/>
               </a:ext>
             </a:extLst>
           </p:cNvPr>
@@ -20905,7 +20966,7 @@
           <p:cNvPr id="5122" name="标题 1">
             <a:extLst>
               <a:ext uri="{FF2B5EF4-FFF2-40B4-BE49-F238E27FC236}">
-                <a16:creationId xmlns="" xmlns:a16="http://schemas.microsoft.com/office/drawing/2014/main" id="{A237414D-C4E1-407F-9B0D-585D2D878A74}"/>
+                <a16:creationId xmlns:a16="http://schemas.microsoft.com/office/drawing/2014/main" xmlns="" id="{A237414D-C4E1-407F-9B0D-585D2D878A74}"/>
               </a:ext>
             </a:extLst>
           </p:cNvPr>
@@ -21367,7 +21428,7 @@
           <p:cNvPr id="5122" name="标题 1">
             <a:extLst>
               <a:ext uri="{FF2B5EF4-FFF2-40B4-BE49-F238E27FC236}">
-                <a16:creationId xmlns="" xmlns:a16="http://schemas.microsoft.com/office/drawing/2014/main" id="{A237414D-C4E1-407F-9B0D-585D2D878A74}"/>
+                <a16:creationId xmlns:a16="http://schemas.microsoft.com/office/drawing/2014/main" xmlns="" id="{A237414D-C4E1-407F-9B0D-585D2D878A74}"/>
               </a:ext>
             </a:extLst>
           </p:cNvPr>
@@ -21986,7 +22047,7 @@
           <p:cNvPr id="5122" name="标题 1">
             <a:extLst>
               <a:ext uri="{FF2B5EF4-FFF2-40B4-BE49-F238E27FC236}">
-                <a16:creationId xmlns="" xmlns:a16="http://schemas.microsoft.com/office/drawing/2014/main" id="{A237414D-C4E1-407F-9B0D-585D2D878A74}"/>
+                <a16:creationId xmlns:a16="http://schemas.microsoft.com/office/drawing/2014/main" xmlns="" id="{A237414D-C4E1-407F-9B0D-585D2D878A74}"/>
               </a:ext>
             </a:extLst>
           </p:cNvPr>
@@ -22167,7 +22228,7 @@
           <p:cNvPr id="5122" name="标题 1">
             <a:extLst>
               <a:ext uri="{FF2B5EF4-FFF2-40B4-BE49-F238E27FC236}">
-                <a16:creationId xmlns="" xmlns:a16="http://schemas.microsoft.com/office/drawing/2014/main" id="{A237414D-C4E1-407F-9B0D-585D2D878A74}"/>
+                <a16:creationId xmlns:a16="http://schemas.microsoft.com/office/drawing/2014/main" xmlns="" id="{A237414D-C4E1-407F-9B0D-585D2D878A74}"/>
               </a:ext>
             </a:extLst>
           </p:cNvPr>
@@ -22580,7 +22641,7 @@
           <p:cNvPr id="5122" name="标题 1">
             <a:extLst>
               <a:ext uri="{FF2B5EF4-FFF2-40B4-BE49-F238E27FC236}">
-                <a16:creationId xmlns="" xmlns:a16="http://schemas.microsoft.com/office/drawing/2014/main" id="{A237414D-C4E1-407F-9B0D-585D2D878A74}"/>
+                <a16:creationId xmlns:a16="http://schemas.microsoft.com/office/drawing/2014/main" xmlns="" id="{A237414D-C4E1-407F-9B0D-585D2D878A74}"/>
               </a:ext>
             </a:extLst>
           </p:cNvPr>
@@ -22620,7 +22681,7 @@
           <p:cNvPr id="3" name="内容占位符 2">
             <a:extLst>
               <a:ext uri="{FF2B5EF4-FFF2-40B4-BE49-F238E27FC236}">
-                <a16:creationId xmlns="" xmlns:a16="http://schemas.microsoft.com/office/drawing/2014/main" id="{3DFD56C3-3B63-4F4C-A455-80D220434928}"/>
+                <a16:creationId xmlns:a16="http://schemas.microsoft.com/office/drawing/2014/main" xmlns="" id="{3DFD56C3-3B63-4F4C-A455-80D220434928}"/>
               </a:ext>
             </a:extLst>
           </p:cNvPr>
@@ -22996,7 +23057,7 @@
           <p:cNvPr id="5122" name="标题 1">
             <a:extLst>
               <a:ext uri="{FF2B5EF4-FFF2-40B4-BE49-F238E27FC236}">
-                <a16:creationId xmlns="" xmlns:a16="http://schemas.microsoft.com/office/drawing/2014/main" id="{A237414D-C4E1-407F-9B0D-585D2D878A74}"/>
+                <a16:creationId xmlns:a16="http://schemas.microsoft.com/office/drawing/2014/main" xmlns="" id="{A237414D-C4E1-407F-9B0D-585D2D878A74}"/>
               </a:ext>
             </a:extLst>
           </p:cNvPr>
@@ -23032,7 +23093,7 @@
           <p:cNvPr id="3" name="内容占位符 2">
             <a:extLst>
               <a:ext uri="{FF2B5EF4-FFF2-40B4-BE49-F238E27FC236}">
-                <a16:creationId xmlns="" xmlns:a16="http://schemas.microsoft.com/office/drawing/2014/main" id="{3DFD56C3-3B63-4F4C-A455-80D220434928}"/>
+                <a16:creationId xmlns:a16="http://schemas.microsoft.com/office/drawing/2014/main" xmlns="" id="{3DFD56C3-3B63-4F4C-A455-80D220434928}"/>
               </a:ext>
             </a:extLst>
           </p:cNvPr>
@@ -23213,7 +23274,7 @@
           <p:cNvPr id="5122" name="标题 1">
             <a:extLst>
               <a:ext uri="{FF2B5EF4-FFF2-40B4-BE49-F238E27FC236}">
-                <a16:creationId xmlns="" xmlns:a16="http://schemas.microsoft.com/office/drawing/2014/main" id="{A237414D-C4E1-407F-9B0D-585D2D878A74}"/>
+                <a16:creationId xmlns:a16="http://schemas.microsoft.com/office/drawing/2014/main" xmlns="" id="{A237414D-C4E1-407F-9B0D-585D2D878A74}"/>
               </a:ext>
             </a:extLst>
           </p:cNvPr>
@@ -23249,7 +23310,7 @@
           <p:cNvPr id="3" name="内容占位符 2">
             <a:extLst>
               <a:ext uri="{FF2B5EF4-FFF2-40B4-BE49-F238E27FC236}">
-                <a16:creationId xmlns="" xmlns:a16="http://schemas.microsoft.com/office/drawing/2014/main" id="{3DFD56C3-3B63-4F4C-A455-80D220434928}"/>
+                <a16:creationId xmlns:a16="http://schemas.microsoft.com/office/drawing/2014/main" xmlns="" id="{3DFD56C3-3B63-4F4C-A455-80D220434928}"/>
               </a:ext>
             </a:extLst>
           </p:cNvPr>
@@ -23403,7 +23464,7 @@
           <p:cNvPr id="5122" name="标题 1">
             <a:extLst>
               <a:ext uri="{FF2B5EF4-FFF2-40B4-BE49-F238E27FC236}">
-                <a16:creationId xmlns="" xmlns:a16="http://schemas.microsoft.com/office/drawing/2014/main" id="{A237414D-C4E1-407F-9B0D-585D2D878A74}"/>
+                <a16:creationId xmlns:a16="http://schemas.microsoft.com/office/drawing/2014/main" xmlns="" id="{A237414D-C4E1-407F-9B0D-585D2D878A74}"/>
               </a:ext>
             </a:extLst>
           </p:cNvPr>
@@ -23439,7 +23500,7 @@
           <p:cNvPr id="3" name="内容占位符 2">
             <a:extLst>
               <a:ext uri="{FF2B5EF4-FFF2-40B4-BE49-F238E27FC236}">
-                <a16:creationId xmlns="" xmlns:a16="http://schemas.microsoft.com/office/drawing/2014/main" id="{3DFD56C3-3B63-4F4C-A455-80D220434928}"/>
+                <a16:creationId xmlns:a16="http://schemas.microsoft.com/office/drawing/2014/main" xmlns="" id="{3DFD56C3-3B63-4F4C-A455-80D220434928}"/>
               </a:ext>
             </a:extLst>
           </p:cNvPr>
@@ -23666,7 +23727,7 @@
           <p:cNvPr id="5122" name="标题 1">
             <a:extLst>
               <a:ext uri="{FF2B5EF4-FFF2-40B4-BE49-F238E27FC236}">
-                <a16:creationId xmlns="" xmlns:a16="http://schemas.microsoft.com/office/drawing/2014/main" id="{A237414D-C4E1-407F-9B0D-585D2D878A74}"/>
+                <a16:creationId xmlns:a16="http://schemas.microsoft.com/office/drawing/2014/main" xmlns="" id="{A237414D-C4E1-407F-9B0D-585D2D878A74}"/>
               </a:ext>
             </a:extLst>
           </p:cNvPr>
@@ -23706,7 +23767,7 @@
           <p:cNvPr id="3" name="内容占位符 2">
             <a:extLst>
               <a:ext uri="{FF2B5EF4-FFF2-40B4-BE49-F238E27FC236}">
-                <a16:creationId xmlns="" xmlns:a16="http://schemas.microsoft.com/office/drawing/2014/main" id="{3DFD56C3-3B63-4F4C-A455-80D220434928}"/>
+                <a16:creationId xmlns:a16="http://schemas.microsoft.com/office/drawing/2014/main" xmlns="" id="{3DFD56C3-3B63-4F4C-A455-80D220434928}"/>
               </a:ext>
             </a:extLst>
           </p:cNvPr>
@@ -24082,7 +24143,7 @@
           <p:cNvPr id="5122" name="标题 1">
             <a:extLst>
               <a:ext uri="{FF2B5EF4-FFF2-40B4-BE49-F238E27FC236}">
-                <a16:creationId xmlns="" xmlns:a16="http://schemas.microsoft.com/office/drawing/2014/main" id="{A237414D-C4E1-407F-9B0D-585D2D878A74}"/>
+                <a16:creationId xmlns:a16="http://schemas.microsoft.com/office/drawing/2014/main" xmlns="" id="{A237414D-C4E1-407F-9B0D-585D2D878A74}"/>
               </a:ext>
             </a:extLst>
           </p:cNvPr>
@@ -24122,7 +24183,7 @@
           <p:cNvPr id="3" name="内容占位符 2">
             <a:extLst>
               <a:ext uri="{FF2B5EF4-FFF2-40B4-BE49-F238E27FC236}">
-                <a16:creationId xmlns="" xmlns:a16="http://schemas.microsoft.com/office/drawing/2014/main" id="{3DFD56C3-3B63-4F4C-A455-80D220434928}"/>
+                <a16:creationId xmlns:a16="http://schemas.microsoft.com/office/drawing/2014/main" xmlns="" id="{3DFD56C3-3B63-4F4C-A455-80D220434928}"/>
               </a:ext>
             </a:extLst>
           </p:cNvPr>
@@ -24415,7 +24476,7 @@
           <p:cNvPr id="5122" name="标题 1">
             <a:extLst>
               <a:ext uri="{FF2B5EF4-FFF2-40B4-BE49-F238E27FC236}">
-                <a16:creationId xmlns="" xmlns:a16="http://schemas.microsoft.com/office/drawing/2014/main" id="{A237414D-C4E1-407F-9B0D-585D2D878A74}"/>
+                <a16:creationId xmlns:a16="http://schemas.microsoft.com/office/drawing/2014/main" xmlns="" id="{A237414D-C4E1-407F-9B0D-585D2D878A74}"/>
               </a:ext>
             </a:extLst>
           </p:cNvPr>
@@ -24455,7 +24516,7 @@
           <p:cNvPr id="3" name="内容占位符 2">
             <a:extLst>
               <a:ext uri="{FF2B5EF4-FFF2-40B4-BE49-F238E27FC236}">
-                <a16:creationId xmlns="" xmlns:a16="http://schemas.microsoft.com/office/drawing/2014/main" id="{3DFD56C3-3B63-4F4C-A455-80D220434928}"/>
+                <a16:creationId xmlns:a16="http://schemas.microsoft.com/office/drawing/2014/main" xmlns="" id="{3DFD56C3-3B63-4F4C-A455-80D220434928}"/>
               </a:ext>
             </a:extLst>
           </p:cNvPr>
@@ -24821,7 +24882,7 @@
           <p:cNvPr id="5122" name="标题 1">
             <a:extLst>
               <a:ext uri="{FF2B5EF4-FFF2-40B4-BE49-F238E27FC236}">
-                <a16:creationId xmlns="" xmlns:a16="http://schemas.microsoft.com/office/drawing/2014/main" id="{A237414D-C4E1-407F-9B0D-585D2D878A74}"/>
+                <a16:creationId xmlns:a16="http://schemas.microsoft.com/office/drawing/2014/main" xmlns="" id="{A237414D-C4E1-407F-9B0D-585D2D878A74}"/>
               </a:ext>
             </a:extLst>
           </p:cNvPr>
@@ -24861,7 +24922,7 @@
           <p:cNvPr id="3" name="内容占位符 2">
             <a:extLst>
               <a:ext uri="{FF2B5EF4-FFF2-40B4-BE49-F238E27FC236}">
-                <a16:creationId xmlns="" xmlns:a16="http://schemas.microsoft.com/office/drawing/2014/main" id="{3DFD56C3-3B63-4F4C-A455-80D220434928}"/>
+                <a16:creationId xmlns:a16="http://schemas.microsoft.com/office/drawing/2014/main" xmlns="" id="{3DFD56C3-3B63-4F4C-A455-80D220434928}"/>
               </a:ext>
             </a:extLst>
           </p:cNvPr>
@@ -25028,13 +25089,6 @@
                 <a:cs typeface="Times New Roman" panose="02020603050405020304" pitchFamily="18" charset="0"/>
               </a:rPr>
               <a:t>in this article for future GPUs.</a:t>
-            </a:r>
-            <a:r>
-              <a:rPr lang="en-US" altLang="zh-CN" dirty="0">
-                <a:latin typeface="Times New Roman" panose="02020603050405020304" pitchFamily="18" charset="0"/>
-                <a:cs typeface="Times New Roman" panose="02020603050405020304" pitchFamily="18" charset="0"/>
-              </a:rPr>
-              <a:t/>
             </a:r>
             <a:br>
               <a:rPr lang="en-US" altLang="zh-CN" dirty="0">
@@ -25120,7 +25174,7 @@
           <p:cNvPr id="5122" name="标题 1">
             <a:extLst>
               <a:ext uri="{FF2B5EF4-FFF2-40B4-BE49-F238E27FC236}">
-                <a16:creationId xmlns="" xmlns:a16="http://schemas.microsoft.com/office/drawing/2014/main" id="{A237414D-C4E1-407F-9B0D-585D2D878A74}"/>
+                <a16:creationId xmlns:a16="http://schemas.microsoft.com/office/drawing/2014/main" xmlns="" id="{A237414D-C4E1-407F-9B0D-585D2D878A74}"/>
               </a:ext>
             </a:extLst>
           </p:cNvPr>
@@ -25160,7 +25214,7 @@
           <p:cNvPr id="3" name="内容占位符 2">
             <a:extLst>
               <a:ext uri="{FF2B5EF4-FFF2-40B4-BE49-F238E27FC236}">
-                <a16:creationId xmlns="" xmlns:a16="http://schemas.microsoft.com/office/drawing/2014/main" id="{3DFD56C3-3B63-4F4C-A455-80D220434928}"/>
+                <a16:creationId xmlns:a16="http://schemas.microsoft.com/office/drawing/2014/main" xmlns="" id="{3DFD56C3-3B63-4F4C-A455-80D220434928}"/>
               </a:ext>
             </a:extLst>
           </p:cNvPr>
@@ -25517,7 +25571,7 @@
           <p:cNvPr id="5122" name="标题 1">
             <a:extLst>
               <a:ext uri="{FF2B5EF4-FFF2-40B4-BE49-F238E27FC236}">
-                <a16:creationId xmlns="" xmlns:a16="http://schemas.microsoft.com/office/drawing/2014/main" id="{A237414D-C4E1-407F-9B0D-585D2D878A74}"/>
+                <a16:creationId xmlns:a16="http://schemas.microsoft.com/office/drawing/2014/main" xmlns="" id="{A237414D-C4E1-407F-9B0D-585D2D878A74}"/>
               </a:ext>
             </a:extLst>
           </p:cNvPr>
@@ -25557,7 +25611,7 @@
           <p:cNvPr id="3" name="内容占位符 2">
             <a:extLst>
               <a:ext uri="{FF2B5EF4-FFF2-40B4-BE49-F238E27FC236}">
-                <a16:creationId xmlns="" xmlns:a16="http://schemas.microsoft.com/office/drawing/2014/main" id="{3DFD56C3-3B63-4F4C-A455-80D220434928}"/>
+                <a16:creationId xmlns:a16="http://schemas.microsoft.com/office/drawing/2014/main" xmlns="" id="{3DFD56C3-3B63-4F4C-A455-80D220434928}"/>
               </a:ext>
             </a:extLst>
           </p:cNvPr>
@@ -26116,7 +26170,7 @@
           <p:cNvPr id="5122" name="标题 1">
             <a:extLst>
               <a:ext uri="{FF2B5EF4-FFF2-40B4-BE49-F238E27FC236}">
-                <a16:creationId xmlns="" xmlns:a16="http://schemas.microsoft.com/office/drawing/2014/main" id="{A237414D-C4E1-407F-9B0D-585D2D878A74}"/>
+                <a16:creationId xmlns:a16="http://schemas.microsoft.com/office/drawing/2014/main" xmlns="" id="{A237414D-C4E1-407F-9B0D-585D2D878A74}"/>
               </a:ext>
             </a:extLst>
           </p:cNvPr>
@@ -26156,7 +26210,7 @@
           <p:cNvPr id="3" name="内容占位符 2">
             <a:extLst>
               <a:ext uri="{FF2B5EF4-FFF2-40B4-BE49-F238E27FC236}">
-                <a16:creationId xmlns="" xmlns:a16="http://schemas.microsoft.com/office/drawing/2014/main" id="{3DFD56C3-3B63-4F4C-A455-80D220434928}"/>
+                <a16:creationId xmlns:a16="http://schemas.microsoft.com/office/drawing/2014/main" xmlns="" id="{3DFD56C3-3B63-4F4C-A455-80D220434928}"/>
               </a:ext>
             </a:extLst>
           </p:cNvPr>
@@ -26404,7 +26458,7 @@
           <p:cNvPr id="5122" name="标题 1">
             <a:extLst>
               <a:ext uri="{FF2B5EF4-FFF2-40B4-BE49-F238E27FC236}">
-                <a16:creationId xmlns="" xmlns:a16="http://schemas.microsoft.com/office/drawing/2014/main" id="{A237414D-C4E1-407F-9B0D-585D2D878A74}"/>
+                <a16:creationId xmlns:a16="http://schemas.microsoft.com/office/drawing/2014/main" xmlns="" id="{A237414D-C4E1-407F-9B0D-585D2D878A74}"/>
               </a:ext>
             </a:extLst>
           </p:cNvPr>
@@ -26444,7 +26498,7 @@
           <p:cNvPr id="3" name="内容占位符 2">
             <a:extLst>
               <a:ext uri="{FF2B5EF4-FFF2-40B4-BE49-F238E27FC236}">
-                <a16:creationId xmlns="" xmlns:a16="http://schemas.microsoft.com/office/drawing/2014/main" id="{3DFD56C3-3B63-4F4C-A455-80D220434928}"/>
+                <a16:creationId xmlns:a16="http://schemas.microsoft.com/office/drawing/2014/main" xmlns="" id="{3DFD56C3-3B63-4F4C-A455-80D220434928}"/>
               </a:ext>
             </a:extLst>
           </p:cNvPr>
@@ -26722,7 +26776,7 @@
           <p:cNvPr id="5122" name="标题 1">
             <a:extLst>
               <a:ext uri="{FF2B5EF4-FFF2-40B4-BE49-F238E27FC236}">
-                <a16:creationId xmlns="" xmlns:a16="http://schemas.microsoft.com/office/drawing/2014/main" id="{A237414D-C4E1-407F-9B0D-585D2D878A74}"/>
+                <a16:creationId xmlns:a16="http://schemas.microsoft.com/office/drawing/2014/main" xmlns="" id="{A237414D-C4E1-407F-9B0D-585D2D878A74}"/>
               </a:ext>
             </a:extLst>
           </p:cNvPr>
@@ -26762,7 +26816,7 @@
           <p:cNvPr id="3" name="内容占位符 2">
             <a:extLst>
               <a:ext uri="{FF2B5EF4-FFF2-40B4-BE49-F238E27FC236}">
-                <a16:creationId xmlns="" xmlns:a16="http://schemas.microsoft.com/office/drawing/2014/main" id="{3DFD56C3-3B63-4F4C-A455-80D220434928}"/>
+                <a16:creationId xmlns:a16="http://schemas.microsoft.com/office/drawing/2014/main" xmlns="" id="{3DFD56C3-3B63-4F4C-A455-80D220434928}"/>
               </a:ext>
             </a:extLst>
           </p:cNvPr>
@@ -27134,7 +27188,7 @@
           <p:cNvPr id="5122" name="标题 1">
             <a:extLst>
               <a:ext uri="{FF2B5EF4-FFF2-40B4-BE49-F238E27FC236}">
-                <a16:creationId xmlns="" xmlns:a16="http://schemas.microsoft.com/office/drawing/2014/main" id="{A237414D-C4E1-407F-9B0D-585D2D878A74}"/>
+                <a16:creationId xmlns:a16="http://schemas.microsoft.com/office/drawing/2014/main" xmlns="" id="{A237414D-C4E1-407F-9B0D-585D2D878A74}"/>
               </a:ext>
             </a:extLst>
           </p:cNvPr>
@@ -27174,7 +27228,7 @@
           <p:cNvPr id="3" name="内容占位符 2">
             <a:extLst>
               <a:ext uri="{FF2B5EF4-FFF2-40B4-BE49-F238E27FC236}">
-                <a16:creationId xmlns="" xmlns:a16="http://schemas.microsoft.com/office/drawing/2014/main" id="{3DFD56C3-3B63-4F4C-A455-80D220434928}"/>
+                <a16:creationId xmlns:a16="http://schemas.microsoft.com/office/drawing/2014/main" xmlns="" id="{3DFD56C3-3B63-4F4C-A455-80D220434928}"/>
               </a:ext>
             </a:extLst>
           </p:cNvPr>
